--- a/KHBD_Tin_học/Lớp_4/Tuần_02/Slide_Tin_hoc_Lop_4_Bai01_Phan_cung_va_phan_mem.pptx
+++ b/KHBD_Tin_học/Lớp_4/Tuần_02/Slide_Tin_hoc_Lop_4_Bai01_Phan_cung_va_phan_mem.pptx
@@ -3389,6 +3389,12 @@
 <p:sld xmlns:a="http://schemas.openxmlformats.org/drawingml/2006/main" xmlns:p="http://schemas.openxmlformats.org/presentationml/2006/main" xmlns:r="http://schemas.openxmlformats.org/officeDocument/2006/relationships">
   <p:cSld>
     <p:spTree>
+      <p:nvGrpSpPr>
+        <p:cNvPr id="1" name=""/>
+        <p:cNvGrpSpPr/>
+        <p:nvPr/>
+      </p:nvGrpSpPr>
+      <p:grpSpPr/>
       <p:sp>
         <p:nvSpPr>
           <p:cNvPr id="3" name="Rectangle 2"/>
@@ -3475,12 +3481,6 @@
           </a:p>
         </p:txBody>
       </p:sp>
-      <p:nvGrpSpPr>
-        <p:cNvPr id="1" name=""/>
-        <p:cNvGrpSpPr/>
-        <p:nvPr/>
-      </p:nvGrpSpPr>
-      <p:grpSpPr/>
       <p:sp>
         <p:nvSpPr>
           <p:cNvPr id="4" name="TextBox 3"/>
@@ -3590,6 +3590,12 @@
 <p:sld xmlns:a="http://schemas.openxmlformats.org/drawingml/2006/main" xmlns:p="http://schemas.openxmlformats.org/presentationml/2006/main" xmlns:r="http://schemas.openxmlformats.org/officeDocument/2006/relationships">
   <p:cSld>
     <p:spTree>
+      <p:nvGrpSpPr>
+        <p:cNvPr id="1" name=""/>
+        <p:cNvGrpSpPr/>
+        <p:nvPr/>
+      </p:nvGrpSpPr>
+      <p:grpSpPr/>
       <p:sp>
         <p:nvSpPr>
           <p:cNvPr id="2" name="Rectangle 1"/>
@@ -3633,12 +3639,6 @@
           </a:p>
         </p:txBody>
       </p:sp>
-      <p:nvGrpSpPr>
-        <p:cNvPr id="1" name=""/>
-        <p:cNvGrpSpPr/>
-        <p:nvPr/>
-      </p:nvGrpSpPr>
-      <p:grpSpPr/>
       <p:sp>
         <p:nvSpPr>
           <p:cNvPr id="3" name="Rectangle 2"/>
@@ -3964,6 +3964,12 @@
 <p:sld xmlns:a="http://schemas.openxmlformats.org/drawingml/2006/main" xmlns:p="http://schemas.openxmlformats.org/presentationml/2006/main" xmlns:r="http://schemas.openxmlformats.org/officeDocument/2006/relationships">
   <p:cSld>
     <p:spTree>
+      <p:nvGrpSpPr>
+        <p:cNvPr id="1" name=""/>
+        <p:cNvGrpSpPr/>
+        <p:nvPr/>
+      </p:nvGrpSpPr>
+      <p:grpSpPr/>
       <p:sp>
         <p:nvSpPr>
           <p:cNvPr id="2" name="Rectangle 1"/>
@@ -4007,12 +4013,6 @@
           </a:p>
         </p:txBody>
       </p:sp>
-      <p:nvGrpSpPr>
-        <p:cNvPr id="1" name=""/>
-        <p:cNvGrpSpPr/>
-        <p:nvPr/>
-      </p:nvGrpSpPr>
-      <p:grpSpPr/>
       <p:sp>
         <p:nvSpPr>
           <p:cNvPr id="3" name="Rectangle 2"/>
@@ -4338,6 +4338,12 @@
 <p:sld xmlns:a="http://schemas.openxmlformats.org/drawingml/2006/main" xmlns:p="http://schemas.openxmlformats.org/presentationml/2006/main" xmlns:r="http://schemas.openxmlformats.org/officeDocument/2006/relationships">
   <p:cSld>
     <p:spTree>
+      <p:nvGrpSpPr>
+        <p:cNvPr id="1" name=""/>
+        <p:cNvGrpSpPr/>
+        <p:nvPr/>
+      </p:nvGrpSpPr>
+      <p:grpSpPr/>
       <p:sp>
         <p:nvSpPr>
           <p:cNvPr id="2" name="Rectangle 1"/>
@@ -4381,12 +4387,6 @@
           </a:p>
         </p:txBody>
       </p:sp>
-      <p:nvGrpSpPr>
-        <p:cNvPr id="1" name=""/>
-        <p:cNvGrpSpPr/>
-        <p:nvPr/>
-      </p:nvGrpSpPr>
-      <p:grpSpPr/>
       <p:sp>
         <p:nvSpPr>
           <p:cNvPr id="3" name="Rectangle 2"/>
@@ -4712,6 +4712,12 @@
 <p:sld xmlns:a="http://schemas.openxmlformats.org/drawingml/2006/main" xmlns:p="http://schemas.openxmlformats.org/presentationml/2006/main" xmlns:r="http://schemas.openxmlformats.org/officeDocument/2006/relationships">
   <p:cSld>
     <p:spTree>
+      <p:nvGrpSpPr>
+        <p:cNvPr id="1" name=""/>
+        <p:cNvGrpSpPr/>
+        <p:nvPr/>
+      </p:nvGrpSpPr>
+      <p:grpSpPr/>
       <p:sp>
         <p:nvSpPr>
           <p:cNvPr id="2" name="Rectangle 1"/>
@@ -4755,12 +4761,6 @@
           </a:p>
         </p:txBody>
       </p:sp>
-      <p:nvGrpSpPr>
-        <p:cNvPr id="1" name=""/>
-        <p:cNvGrpSpPr/>
-        <p:nvPr/>
-      </p:nvGrpSpPr>
-      <p:grpSpPr/>
       <p:sp>
         <p:nvSpPr>
           <p:cNvPr id="3" name="Rectangle 2"/>
@@ -5118,6 +5118,12 @@
 <p:sld xmlns:a="http://schemas.openxmlformats.org/drawingml/2006/main" xmlns:p="http://schemas.openxmlformats.org/presentationml/2006/main" xmlns:r="http://schemas.openxmlformats.org/officeDocument/2006/relationships">
   <p:cSld>
     <p:spTree>
+      <p:nvGrpSpPr>
+        <p:cNvPr id="1" name=""/>
+        <p:cNvGrpSpPr/>
+        <p:nvPr/>
+      </p:nvGrpSpPr>
+      <p:grpSpPr/>
       <p:sp>
         <p:nvSpPr>
           <p:cNvPr id="2" name="Rectangle 1"/>
@@ -5161,12 +5167,6 @@
           </a:p>
         </p:txBody>
       </p:sp>
-      <p:nvGrpSpPr>
-        <p:cNvPr id="1" name=""/>
-        <p:cNvGrpSpPr/>
-        <p:nvPr/>
-      </p:nvGrpSpPr>
-      <p:grpSpPr/>
       <p:sp>
         <p:nvSpPr>
           <p:cNvPr id="3" name="Rectangle 2"/>
@@ -5814,6 +5814,12 @@
 <p:sld xmlns:a="http://schemas.openxmlformats.org/drawingml/2006/main" xmlns:p="http://schemas.openxmlformats.org/presentationml/2006/main" xmlns:r="http://schemas.openxmlformats.org/officeDocument/2006/relationships">
   <p:cSld>
     <p:spTree>
+      <p:nvGrpSpPr>
+        <p:cNvPr id="1" name=""/>
+        <p:cNvGrpSpPr/>
+        <p:nvPr/>
+      </p:nvGrpSpPr>
+      <p:grpSpPr/>
       <p:sp>
         <p:nvSpPr>
           <p:cNvPr id="2" name="Rectangle 1"/>
@@ -5857,12 +5863,6 @@
           </a:p>
         </p:txBody>
       </p:sp>
-      <p:nvGrpSpPr>
-        <p:cNvPr id="1" name=""/>
-        <p:cNvGrpSpPr/>
-        <p:nvPr/>
-      </p:nvGrpSpPr>
-      <p:grpSpPr/>
       <p:sp>
         <p:nvSpPr>
           <p:cNvPr id="3" name="Rectangle 2"/>
@@ -6094,6 +6094,12 @@
 <p:sld xmlns:a="http://schemas.openxmlformats.org/drawingml/2006/main" xmlns:p="http://schemas.openxmlformats.org/presentationml/2006/main" xmlns:r="http://schemas.openxmlformats.org/officeDocument/2006/relationships">
   <p:cSld>
     <p:spTree>
+      <p:nvGrpSpPr>
+        <p:cNvPr id="1" name=""/>
+        <p:cNvGrpSpPr/>
+        <p:nvPr/>
+      </p:nvGrpSpPr>
+      <p:grpSpPr/>
       <p:sp>
         <p:nvSpPr>
           <p:cNvPr id="2" name="Rectangle 1"/>
@@ -6137,12 +6143,6 @@
           </a:p>
         </p:txBody>
       </p:sp>
-      <p:nvGrpSpPr>
-        <p:cNvPr id="1" name=""/>
-        <p:cNvGrpSpPr/>
-        <p:nvPr/>
-      </p:nvGrpSpPr>
-      <p:grpSpPr/>
       <p:sp>
         <p:nvSpPr>
           <p:cNvPr id="3" name="Rounded Rectangle 2"/>
@@ -6685,6 +6685,12 @@
 <p:sld xmlns:a="http://schemas.openxmlformats.org/drawingml/2006/main" xmlns:p="http://schemas.openxmlformats.org/presentationml/2006/main" xmlns:r="http://schemas.openxmlformats.org/officeDocument/2006/relationships">
   <p:cSld>
     <p:spTree>
+      <p:nvGrpSpPr>
+        <p:cNvPr id="1" name=""/>
+        <p:cNvGrpSpPr/>
+        <p:nvPr/>
+      </p:nvGrpSpPr>
+      <p:grpSpPr/>
       <p:sp>
         <p:nvSpPr>
           <p:cNvPr id="2" name="Rectangle 1"/>
@@ -6728,12 +6734,6 @@
           </a:p>
         </p:txBody>
       </p:sp>
-      <p:nvGrpSpPr>
-        <p:cNvPr id="1" name=""/>
-        <p:cNvGrpSpPr/>
-        <p:nvPr/>
-      </p:nvGrpSpPr>
-      <p:grpSpPr/>
       <p:sp>
         <p:nvSpPr>
           <p:cNvPr id="3" name="TextBox 2"/>

--- a/KHBD_Tin_học/Lớp_4/Tuần_02/Slide_Tin_hoc_Lop_4_Bai01_Phan_cung_va_phan_mem.pptx
+++ b/KHBD_Tin_học/Lớp_4/Tuần_02/Slide_Tin_hoc_Lop_4_Bai01_Phan_cung_va_phan_mem.pptx
@@ -3489,8 +3489,8 @@
         </p:nvSpPr>
         <p:spPr>
           <a:xfrm>
-            <a:off x="1371600" y="2011680"/>
-            <a:ext cx="9445752" cy="1371600"/>
+            <a:off x="731520" y="1828800"/>
+            <a:ext cx="6858000" cy="1371600"/>
           </a:xfrm>
           <a:prstGeom prst="rect">
             <a:avLst/>
@@ -3503,9 +3503,9 @@
           </a:bodyPr>
           <a:lstStyle/>
           <a:p>
-            <a:pPr algn="ctr"/>
-            <a:r>
-              <a:rPr sz="3600" b="1">
+            <a:pPr algn="l"/>
+            <a:r>
+              <a:rPr sz="3400" b="1">
                 <a:solidFill>
                   <a:srgbClr val="FFFFFF"/>
                 </a:solidFill>
@@ -3524,8 +3524,8 @@
         </p:nvSpPr>
         <p:spPr>
           <a:xfrm>
-            <a:off x="1371600" y="3657600"/>
-            <a:ext cx="9445752" cy="731520"/>
+            <a:off x="731520" y="3474720"/>
+            <a:ext cx="6858000" cy="731520"/>
           </a:xfrm>
           <a:prstGeom prst="rect">
             <a:avLst/>
@@ -3538,7 +3538,7 @@
           </a:bodyPr>
           <a:lstStyle/>
           <a:p>
-            <a:pPr algn="ctr"/>
+            <a:pPr algn="l"/>
             <a:r>
               <a:rPr sz="2000" b="0">
                 <a:solidFill>
@@ -3726,7 +3726,7 @@
         <p:spPr>
           <a:xfrm>
             <a:off x="457200" y="1600200"/>
-            <a:ext cx="11274552" cy="594360"/>
+            <a:ext cx="7315200" cy="594360"/>
           </a:xfrm>
           <a:prstGeom prst="rect">
             <a:avLst/>
@@ -3846,8 +3846,8 @@
         </p:nvSpPr>
         <p:spPr>
           <a:xfrm>
-            <a:off x="731520" y="2423160"/>
-            <a:ext cx="6309360" cy="3108960"/>
+            <a:off x="731520" y="2468880"/>
+            <a:ext cx="6309360" cy="3017520"/>
           </a:xfrm>
           <a:prstGeom prst="rect">
             <a:avLst/>
@@ -3866,13 +3866,13 @@
               </a:spcAft>
             </a:pPr>
             <a:r>
-              <a:rPr sz="1800" b="0">
+              <a:rPr sz="2000" b="0">
                 <a:solidFill>
                   <a:srgbClr val="1E1B4B"/>
                 </a:solidFill>
                 <a:latin typeface="Arial"/>
               </a:rPr>
-              <a:t>Em có thể sờ được bàn phím không? → CÓ</a:t>
+              <a:t>Em có thể chạm tay vào bàn phím không? → CÓ</a:t>
             </a:r>
           </a:p>
           <a:p>
@@ -3882,13 +3882,13 @@
               </a:spcAft>
             </a:pPr>
             <a:r>
-              <a:rPr sz="1800" b="0">
+              <a:rPr sz="2000" b="0">
                 <a:solidFill>
                   <a:srgbClr val="1E1B4B"/>
                 </a:solidFill>
                 <a:latin typeface="Arial"/>
               </a:rPr>
-              <a:t>Em có thể sờ được trò chơi trong máy không? → KHÔNG</a:t>
+              <a:t>Em có thể sờ vào nhân vật trong trò chơi không? → KHÔNG</a:t>
             </a:r>
           </a:p>
           <a:p>
@@ -3898,29 +3898,13 @@
               </a:spcAft>
             </a:pPr>
             <a:r>
-              <a:rPr sz="1800" b="0">
+              <a:rPr sz="2000" b="0">
                 <a:solidFill>
                   <a:srgbClr val="1E1B4B"/>
                 </a:solidFill>
                 <a:latin typeface="Arial"/>
               </a:rPr>
-              <a:t/>
-            </a:r>
-          </a:p>
-          <a:p>
-            <a:pPr algn="l">
-              <a:spcAft>
-                <a:spcPts val="600"/>
-              </a:spcAft>
-            </a:pPr>
-            <a:r>
-              <a:rPr sz="1800" b="0">
-                <a:solidFill>
-                  <a:srgbClr val="1E1B4B"/>
-                </a:solidFill>
-                <a:latin typeface="Arial"/>
-              </a:rPr>
-              <a:t>Vì sao nhỉ?</a:t>
+              <a:t>Vì sao lại như vậy?</a:t>
             </a:r>
           </a:p>
         </p:txBody>
@@ -4134,8 +4118,8 @@
         </p:nvSpPr>
         <p:spPr>
           <a:xfrm>
-            <a:off x="365760" y="2286000"/>
-            <a:ext cx="6858000" cy="3383279"/>
+            <a:off x="457200" y="2628900"/>
+            <a:ext cx="3605784" cy="2788920"/>
           </a:xfrm>
           <a:prstGeom prst="roundRect">
             <a:avLst/>
@@ -4143,8 +4127,10 @@
           <a:solidFill>
             <a:srgbClr val="FFFFFF"/>
           </a:solidFill>
-          <a:ln>
-            <a:noFill/>
+          <a:ln w="12700">
+            <a:solidFill>
+              <a:srgbClr val="D0D5DD"/>
+            </a:solidFill>
           </a:ln>
         </p:spPr>
         <p:style>
@@ -4177,8 +4163,8 @@
         </p:nvSpPr>
         <p:spPr>
           <a:xfrm>
-            <a:off x="365760" y="2286000"/>
-            <a:ext cx="109728" cy="3383279"/>
+            <a:off x="457200" y="2628900"/>
+            <a:ext cx="3605784" cy="91440"/>
           </a:xfrm>
           <a:prstGeom prst="rect">
             <a:avLst/>
@@ -4212,96 +4198,9 @@
           </a:p>
         </p:txBody>
       </p:sp>
-      <p:sp>
-        <p:nvSpPr>
-          <p:cNvPr id="8" name="TextBox 7"/>
-          <p:cNvSpPr txBox="1"/>
-          <p:nvPr/>
-        </p:nvSpPr>
-        <p:spPr>
-          <a:xfrm>
-            <a:off x="731520" y="2423160"/>
-            <a:ext cx="6309360" cy="3108960"/>
-          </a:xfrm>
-          <a:prstGeom prst="rect">
-            <a:avLst/>
-          </a:prstGeom>
-          <a:noFill/>
-        </p:spPr>
-        <p:txBody>
-          <a:bodyPr wrap="square">
-            <a:spAutoFit/>
-          </a:bodyPr>
-          <a:lstStyle/>
-          <a:p>
-            <a:pPr algn="l">
-              <a:spcAft>
-                <a:spcPts val="600"/>
-              </a:spcAft>
-            </a:pPr>
-            <a:r>
-              <a:rPr sz="1800" b="0">
-                <a:solidFill>
-                  <a:srgbClr val="1E1B4B"/>
-                </a:solidFill>
-                <a:latin typeface="Arial"/>
-              </a:rPr>
-              <a:t>Phần cứng = Những thứ em NHÌN THẤY và SỜ ĐƯỢC:</a:t>
-            </a:r>
-          </a:p>
-          <a:p>
-            <a:pPr algn="l">
-              <a:spcAft>
-                <a:spcPts val="600"/>
-              </a:spcAft>
-            </a:pPr>
-            <a:r>
-              <a:rPr sz="1800" b="0">
-                <a:solidFill>
-                  <a:srgbClr val="1E1B4B"/>
-                </a:solidFill>
-                <a:latin typeface="Arial"/>
-              </a:rPr>
-              <a:t>● Màn hình, bàn phím, chuột</a:t>
-            </a:r>
-          </a:p>
-          <a:p>
-            <a:pPr algn="l">
-              <a:spcAft>
-                <a:spcPts val="600"/>
-              </a:spcAft>
-            </a:pPr>
-            <a:r>
-              <a:rPr sz="1800" b="0">
-                <a:solidFill>
-                  <a:srgbClr val="1E1B4B"/>
-                </a:solidFill>
-                <a:latin typeface="Arial"/>
-              </a:rPr>
-              <a:t>● Loa, tai nghe, webcam</a:t>
-            </a:r>
-          </a:p>
-          <a:p>
-            <a:pPr algn="l">
-              <a:spcAft>
-                <a:spcPts val="600"/>
-              </a:spcAft>
-            </a:pPr>
-            <a:r>
-              <a:rPr sz="1800" b="0">
-                <a:solidFill>
-                  <a:srgbClr val="1E1B4B"/>
-                </a:solidFill>
-                <a:latin typeface="Arial"/>
-              </a:rPr>
-              <a:t>● Ổ cứng, RAM, CPU (bên trong thân máy)</a:t>
-            </a:r>
-          </a:p>
-        </p:txBody>
-      </p:sp>
       <p:pic>
         <p:nvPicPr>
-          <p:cNvPr id="9" name="Picture 8" descr="bai1_p10_img368.png"/>
+          <p:cNvPr id="8" name="Picture 7" descr="bai1_p10_img297.jpeg"/>
           <p:cNvPicPr>
             <a:picLocks noChangeAspect="1"/>
           </p:cNvPicPr>
@@ -4315,21 +4214,350 @@
         </p:blipFill>
         <p:spPr>
           <a:xfrm>
-            <a:off x="7589520" y="2286000"/>
-            <a:ext cx="4114799" cy="3383279"/>
+            <a:off x="1437132" y="2766060"/>
+            <a:ext cx="1645920" cy="1828800"/>
           </a:xfrm>
           <a:prstGeom prst="rect">
             <a:avLst/>
           </a:prstGeom>
         </p:spPr>
       </p:pic>
+      <p:sp>
+        <p:nvSpPr>
+          <p:cNvPr id="9" name="TextBox 8"/>
+          <p:cNvSpPr txBox="1"/>
+          <p:nvPr/>
+        </p:nvSpPr>
+        <p:spPr>
+          <a:xfrm>
+            <a:off x="594360" y="4594860"/>
+            <a:ext cx="3331464" cy="822960"/>
+          </a:xfrm>
+          <a:prstGeom prst="rect">
+            <a:avLst/>
+          </a:prstGeom>
+          <a:noFill/>
+        </p:spPr>
+        <p:txBody>
+          <a:bodyPr wrap="square">
+            <a:spAutoFit/>
+          </a:bodyPr>
+          <a:lstStyle/>
+          <a:p>
+            <a:pPr algn="ctr"/>
+            <a:r>
+              <a:rPr sz="1600" b="0">
+                <a:solidFill>
+                  <a:srgbClr val="1E1B4B"/>
+                </a:solidFill>
+                <a:latin typeface="Arial"/>
+              </a:rPr>
+              <a:t>Màn hình, bàn phím, chuột máy tính</a:t>
+            </a:r>
+          </a:p>
+        </p:txBody>
+      </p:sp>
+      <p:sp>
+        <p:nvSpPr>
+          <p:cNvPr id="10" name="Rounded Rectangle 9"/>
+          <p:cNvSpPr/>
+          <p:nvPr/>
+        </p:nvSpPr>
+        <p:spPr>
+          <a:xfrm>
+            <a:off x="4291584" y="2628900"/>
+            <a:ext cx="3605784" cy="2788920"/>
+          </a:xfrm>
+          <a:prstGeom prst="roundRect">
+            <a:avLst/>
+          </a:prstGeom>
+          <a:solidFill>
+            <a:srgbClr val="FFFFFF"/>
+          </a:solidFill>
+          <a:ln w="12700">
+            <a:solidFill>
+              <a:srgbClr val="D0D5DD"/>
+            </a:solidFill>
+          </a:ln>
+        </p:spPr>
+        <p:style>
+          <a:lnRef idx="1">
+            <a:schemeClr val="accent1"/>
+          </a:lnRef>
+          <a:fillRef idx="3">
+            <a:schemeClr val="accent1"/>
+          </a:fillRef>
+          <a:effectRef idx="2">
+            <a:schemeClr val="accent1"/>
+          </a:effectRef>
+          <a:fontRef idx="minor">
+            <a:schemeClr val="lt1"/>
+          </a:fontRef>
+        </p:style>
+        <p:txBody>
+          <a:bodyPr rtlCol="0" anchor="ctr"/>
+          <a:lstStyle/>
+          <a:p>
+            <a:pPr algn="ctr"/>
+          </a:p>
+        </p:txBody>
+      </p:sp>
+      <p:sp>
+        <p:nvSpPr>
+          <p:cNvPr id="11" name="Rectangle 10"/>
+          <p:cNvSpPr/>
+          <p:nvPr/>
+        </p:nvSpPr>
+        <p:spPr>
+          <a:xfrm>
+            <a:off x="4291584" y="2628900"/>
+            <a:ext cx="3605784" cy="91440"/>
+          </a:xfrm>
+          <a:prstGeom prst="rect">
+            <a:avLst/>
+          </a:prstGeom>
+          <a:solidFill>
+            <a:srgbClr val="4F46E5"/>
+          </a:solidFill>
+          <a:ln>
+            <a:noFill/>
+          </a:ln>
+        </p:spPr>
+        <p:style>
+          <a:lnRef idx="1">
+            <a:schemeClr val="accent1"/>
+          </a:lnRef>
+          <a:fillRef idx="3">
+            <a:schemeClr val="accent1"/>
+          </a:fillRef>
+          <a:effectRef idx="2">
+            <a:schemeClr val="accent1"/>
+          </a:effectRef>
+          <a:fontRef idx="minor">
+            <a:schemeClr val="lt1"/>
+          </a:fontRef>
+        </p:style>
+        <p:txBody>
+          <a:bodyPr rtlCol="0" anchor="ctr"/>
+          <a:lstStyle/>
+          <a:p>
+            <a:pPr algn="ctr"/>
+          </a:p>
+        </p:txBody>
+      </p:sp>
+      <p:pic>
+        <p:nvPicPr>
+          <p:cNvPr id="12" name="Picture 11" descr="bai1_p10_img368.png"/>
+          <p:cNvPicPr>
+            <a:picLocks noChangeAspect="1"/>
+          </p:cNvPicPr>
+          <p:nvPr/>
+        </p:nvPicPr>
+        <p:blipFill>
+          <a:blip r:embed="rId3"/>
+          <a:stretch>
+            <a:fillRect/>
+          </a:stretch>
+        </p:blipFill>
+        <p:spPr>
+          <a:xfrm>
+            <a:off x="5271516" y="2766060"/>
+            <a:ext cx="1645920" cy="1828800"/>
+          </a:xfrm>
+          <a:prstGeom prst="rect">
+            <a:avLst/>
+          </a:prstGeom>
+        </p:spPr>
+      </p:pic>
+      <p:sp>
+        <p:nvSpPr>
+          <p:cNvPr id="13" name="TextBox 12"/>
+          <p:cNvSpPr txBox="1"/>
+          <p:nvPr/>
+        </p:nvSpPr>
+        <p:spPr>
+          <a:xfrm>
+            <a:off x="4428744" y="4594860"/>
+            <a:ext cx="3331464" cy="822960"/>
+          </a:xfrm>
+          <a:prstGeom prst="rect">
+            <a:avLst/>
+          </a:prstGeom>
+          <a:noFill/>
+        </p:spPr>
+        <p:txBody>
+          <a:bodyPr wrap="square">
+            <a:spAutoFit/>
+          </a:bodyPr>
+          <a:lstStyle/>
+          <a:p>
+            <a:pPr algn="ctr"/>
+            <a:r>
+              <a:rPr sz="1600" b="0">
+                <a:solidFill>
+                  <a:srgbClr val="1E1B4B"/>
+                </a:solidFill>
+                <a:latin typeface="Arial"/>
+              </a:rPr>
+              <a:t>Loa, tai nghe, webcam thu hình</a:t>
+            </a:r>
+          </a:p>
+        </p:txBody>
+      </p:sp>
+      <p:sp>
+        <p:nvSpPr>
+          <p:cNvPr id="14" name="Rounded Rectangle 13"/>
+          <p:cNvSpPr/>
+          <p:nvPr/>
+        </p:nvSpPr>
+        <p:spPr>
+          <a:xfrm>
+            <a:off x="8125968" y="2628900"/>
+            <a:ext cx="3605784" cy="2788920"/>
+          </a:xfrm>
+          <a:prstGeom prst="roundRect">
+            <a:avLst/>
+          </a:prstGeom>
+          <a:solidFill>
+            <a:srgbClr val="FFFFFF"/>
+          </a:solidFill>
+          <a:ln w="12700">
+            <a:solidFill>
+              <a:srgbClr val="D0D5DD"/>
+            </a:solidFill>
+          </a:ln>
+        </p:spPr>
+        <p:style>
+          <a:lnRef idx="1">
+            <a:schemeClr val="accent1"/>
+          </a:lnRef>
+          <a:fillRef idx="3">
+            <a:schemeClr val="accent1"/>
+          </a:fillRef>
+          <a:effectRef idx="2">
+            <a:schemeClr val="accent1"/>
+          </a:effectRef>
+          <a:fontRef idx="minor">
+            <a:schemeClr val="lt1"/>
+          </a:fontRef>
+        </p:style>
+        <p:txBody>
+          <a:bodyPr rtlCol="0" anchor="ctr"/>
+          <a:lstStyle/>
+          <a:p>
+            <a:pPr algn="ctr"/>
+          </a:p>
+        </p:txBody>
+      </p:sp>
+      <p:sp>
+        <p:nvSpPr>
+          <p:cNvPr id="15" name="Rectangle 14"/>
+          <p:cNvSpPr/>
+          <p:nvPr/>
+        </p:nvSpPr>
+        <p:spPr>
+          <a:xfrm>
+            <a:off x="8125968" y="2628900"/>
+            <a:ext cx="3605784" cy="91440"/>
+          </a:xfrm>
+          <a:prstGeom prst="rect">
+            <a:avLst/>
+          </a:prstGeom>
+          <a:solidFill>
+            <a:srgbClr val="4F46E5"/>
+          </a:solidFill>
+          <a:ln>
+            <a:noFill/>
+          </a:ln>
+        </p:spPr>
+        <p:style>
+          <a:lnRef idx="1">
+            <a:schemeClr val="accent1"/>
+          </a:lnRef>
+          <a:fillRef idx="3">
+            <a:schemeClr val="accent1"/>
+          </a:fillRef>
+          <a:effectRef idx="2">
+            <a:schemeClr val="accent1"/>
+          </a:effectRef>
+          <a:fontRef idx="minor">
+            <a:schemeClr val="lt1"/>
+          </a:fontRef>
+        </p:style>
+        <p:txBody>
+          <a:bodyPr rtlCol="0" anchor="ctr"/>
+          <a:lstStyle/>
+          <a:p>
+            <a:pPr algn="ctr"/>
+          </a:p>
+        </p:txBody>
+      </p:sp>
+      <p:pic>
+        <p:nvPicPr>
+          <p:cNvPr id="16" name="Picture 15" descr="bai1_p10_img369.png"/>
+          <p:cNvPicPr>
+            <a:picLocks noChangeAspect="1"/>
+          </p:cNvPicPr>
+          <p:nvPr/>
+        </p:nvPicPr>
+        <p:blipFill>
+          <a:blip r:embed="rId4"/>
+          <a:stretch>
+            <a:fillRect/>
+          </a:stretch>
+        </p:blipFill>
+        <p:spPr>
+          <a:xfrm>
+            <a:off x="9105900" y="2766060"/>
+            <a:ext cx="1645920" cy="1828800"/>
+          </a:xfrm>
+          <a:prstGeom prst="rect">
+            <a:avLst/>
+          </a:prstGeom>
+        </p:spPr>
+      </p:pic>
+      <p:sp>
+        <p:nvSpPr>
+          <p:cNvPr id="17" name="TextBox 16"/>
+          <p:cNvSpPr txBox="1"/>
+          <p:nvPr/>
+        </p:nvSpPr>
+        <p:spPr>
+          <a:xfrm>
+            <a:off x="8263128" y="4594860"/>
+            <a:ext cx="3331464" cy="822960"/>
+          </a:xfrm>
+          <a:prstGeom prst="rect">
+            <a:avLst/>
+          </a:prstGeom>
+          <a:noFill/>
+        </p:spPr>
+        <p:txBody>
+          <a:bodyPr wrap="square">
+            <a:spAutoFit/>
+          </a:bodyPr>
+          <a:lstStyle/>
+          <a:p>
+            <a:pPr algn="ctr"/>
+            <a:r>
+              <a:rPr sz="1600" b="0">
+                <a:solidFill>
+                  <a:srgbClr val="1E1B4B"/>
+                </a:solidFill>
+                <a:latin typeface="Arial"/>
+              </a:rPr>
+              <a:t>CPU, RAM, ổ cứng bên trong thân máy</a:t>
+            </a:r>
+          </a:p>
+        </p:txBody>
+      </p:sp>
     </p:spTree>
   </p:cSld>
   <p:clrMapOvr>
     <a:masterClrMapping/>
   </p:clrMapOvr>
   <p:transition spd="med">
-    <p:push dir="l"/>
+    <p:wipe/>
   </p:transition>
 </p:sld>
 </file>
@@ -4508,8 +4736,8 @@
         </p:nvSpPr>
         <p:spPr>
           <a:xfrm>
-            <a:off x="365760" y="2286000"/>
-            <a:ext cx="6858000" cy="3383279"/>
+            <a:off x="457200" y="2628900"/>
+            <a:ext cx="3605784" cy="2788920"/>
           </a:xfrm>
           <a:prstGeom prst="roundRect">
             <a:avLst/>
@@ -4517,8 +4745,10 @@
           <a:solidFill>
             <a:srgbClr val="FFFFFF"/>
           </a:solidFill>
-          <a:ln>
-            <a:noFill/>
+          <a:ln w="12700">
+            <a:solidFill>
+              <a:srgbClr val="D0D5DD"/>
+            </a:solidFill>
           </a:ln>
         </p:spPr>
         <p:style>
@@ -4551,8 +4781,8 @@
         </p:nvSpPr>
         <p:spPr>
           <a:xfrm>
-            <a:off x="365760" y="2286000"/>
-            <a:ext cx="109728" cy="3383279"/>
+            <a:off x="457200" y="2628900"/>
+            <a:ext cx="3605784" cy="91440"/>
           </a:xfrm>
           <a:prstGeom prst="rect">
             <a:avLst/>
@@ -4586,96 +4816,9 @@
           </a:p>
         </p:txBody>
       </p:sp>
-      <p:sp>
-        <p:nvSpPr>
-          <p:cNvPr id="8" name="TextBox 7"/>
-          <p:cNvSpPr txBox="1"/>
-          <p:nvPr/>
-        </p:nvSpPr>
-        <p:spPr>
-          <a:xfrm>
-            <a:off x="731520" y="2423160"/>
-            <a:ext cx="6309360" cy="3108960"/>
-          </a:xfrm>
-          <a:prstGeom prst="rect">
-            <a:avLst/>
-          </a:prstGeom>
-          <a:noFill/>
-        </p:spPr>
-        <p:txBody>
-          <a:bodyPr wrap="square">
-            <a:spAutoFit/>
-          </a:bodyPr>
-          <a:lstStyle/>
-          <a:p>
-            <a:pPr algn="l">
-              <a:spcAft>
-                <a:spcPts val="600"/>
-              </a:spcAft>
-            </a:pPr>
-            <a:r>
-              <a:rPr sz="1800" b="0">
-                <a:solidFill>
-                  <a:srgbClr val="1E1B4B"/>
-                </a:solidFill>
-                <a:latin typeface="Arial"/>
-              </a:rPr>
-              <a:t>Phần mềm = Chương trình CHẠY BÊN TRONG máy:</a:t>
-            </a:r>
-          </a:p>
-          <a:p>
-            <a:pPr algn="l">
-              <a:spcAft>
-                <a:spcPts val="600"/>
-              </a:spcAft>
-            </a:pPr>
-            <a:r>
-              <a:rPr sz="1800" b="0">
-                <a:solidFill>
-                  <a:srgbClr val="1E1B4B"/>
-                </a:solidFill>
-                <a:latin typeface="Arial"/>
-              </a:rPr>
-              <a:t>● Hệ điều hành (Windows, macOS)</a:t>
-            </a:r>
-          </a:p>
-          <a:p>
-            <a:pPr algn="l">
-              <a:spcAft>
-                <a:spcPts val="600"/>
-              </a:spcAft>
-            </a:pPr>
-            <a:r>
-              <a:rPr sz="1800" b="0">
-                <a:solidFill>
-                  <a:srgbClr val="1E1B4B"/>
-                </a:solidFill>
-                <a:latin typeface="Arial"/>
-              </a:rPr>
-              <a:t>● Trình duyệt web (Chrome, Firefox)</a:t>
-            </a:r>
-          </a:p>
-          <a:p>
-            <a:pPr algn="l">
-              <a:spcAft>
-                <a:spcPts val="600"/>
-              </a:spcAft>
-            </a:pPr>
-            <a:r>
-              <a:rPr sz="1800" b="0">
-                <a:solidFill>
-                  <a:srgbClr val="1E1B4B"/>
-                </a:solidFill>
-                <a:latin typeface="Arial"/>
-              </a:rPr>
-              <a:t>● Trò chơi, phần mềm vẽ, phần mềm học</a:t>
-            </a:r>
-          </a:p>
-        </p:txBody>
-      </p:sp>
       <p:pic>
         <p:nvPicPr>
-          <p:cNvPr id="9" name="Picture 8" descr="bai1_p10_img368.png"/>
+          <p:cNvPr id="8" name="Picture 7" descr="bai1_p10_img368.png"/>
           <p:cNvPicPr>
             <a:picLocks noChangeAspect="1"/>
           </p:cNvPicPr>
@@ -4689,14 +4832,343 @@
         </p:blipFill>
         <p:spPr>
           <a:xfrm>
-            <a:off x="7589520" y="2286000"/>
-            <a:ext cx="4114799" cy="3383279"/>
+            <a:off x="1437132" y="2766060"/>
+            <a:ext cx="1645920" cy="1828800"/>
           </a:xfrm>
           <a:prstGeom prst="rect">
             <a:avLst/>
           </a:prstGeom>
         </p:spPr>
       </p:pic>
+      <p:sp>
+        <p:nvSpPr>
+          <p:cNvPr id="9" name="TextBox 8"/>
+          <p:cNvSpPr txBox="1"/>
+          <p:nvPr/>
+        </p:nvSpPr>
+        <p:spPr>
+          <a:xfrm>
+            <a:off x="594360" y="4594860"/>
+            <a:ext cx="3331464" cy="822960"/>
+          </a:xfrm>
+          <a:prstGeom prst="rect">
+            <a:avLst/>
+          </a:prstGeom>
+          <a:noFill/>
+        </p:spPr>
+        <p:txBody>
+          <a:bodyPr wrap="square">
+            <a:spAutoFit/>
+          </a:bodyPr>
+          <a:lstStyle/>
+          <a:p>
+            <a:pPr algn="ctr"/>
+            <a:r>
+              <a:rPr sz="1600" b="0">
+                <a:solidFill>
+                  <a:srgbClr val="1E1B4B"/>
+                </a:solidFill>
+                <a:latin typeface="Arial"/>
+              </a:rPr>
+              <a:t>Hệ điều hành Windows, macOS điều khiển máy</a:t>
+            </a:r>
+          </a:p>
+        </p:txBody>
+      </p:sp>
+      <p:sp>
+        <p:nvSpPr>
+          <p:cNvPr id="10" name="Rounded Rectangle 9"/>
+          <p:cNvSpPr/>
+          <p:nvPr/>
+        </p:nvSpPr>
+        <p:spPr>
+          <a:xfrm>
+            <a:off x="4291584" y="2628900"/>
+            <a:ext cx="3605784" cy="2788920"/>
+          </a:xfrm>
+          <a:prstGeom prst="roundRect">
+            <a:avLst/>
+          </a:prstGeom>
+          <a:solidFill>
+            <a:srgbClr val="FFFFFF"/>
+          </a:solidFill>
+          <a:ln w="12700">
+            <a:solidFill>
+              <a:srgbClr val="D0D5DD"/>
+            </a:solidFill>
+          </a:ln>
+        </p:spPr>
+        <p:style>
+          <a:lnRef idx="1">
+            <a:schemeClr val="accent1"/>
+          </a:lnRef>
+          <a:fillRef idx="3">
+            <a:schemeClr val="accent1"/>
+          </a:fillRef>
+          <a:effectRef idx="2">
+            <a:schemeClr val="accent1"/>
+          </a:effectRef>
+          <a:fontRef idx="minor">
+            <a:schemeClr val="lt1"/>
+          </a:fontRef>
+        </p:style>
+        <p:txBody>
+          <a:bodyPr rtlCol="0" anchor="ctr"/>
+          <a:lstStyle/>
+          <a:p>
+            <a:pPr algn="ctr"/>
+          </a:p>
+        </p:txBody>
+      </p:sp>
+      <p:sp>
+        <p:nvSpPr>
+          <p:cNvPr id="11" name="Rectangle 10"/>
+          <p:cNvSpPr/>
+          <p:nvPr/>
+        </p:nvSpPr>
+        <p:spPr>
+          <a:xfrm>
+            <a:off x="4291584" y="2628900"/>
+            <a:ext cx="3605784" cy="91440"/>
+          </a:xfrm>
+          <a:prstGeom prst="rect">
+            <a:avLst/>
+          </a:prstGeom>
+          <a:solidFill>
+            <a:srgbClr val="4F46E5"/>
+          </a:solidFill>
+          <a:ln>
+            <a:noFill/>
+          </a:ln>
+        </p:spPr>
+        <p:style>
+          <a:lnRef idx="1">
+            <a:schemeClr val="accent1"/>
+          </a:lnRef>
+          <a:fillRef idx="3">
+            <a:schemeClr val="accent1"/>
+          </a:fillRef>
+          <a:effectRef idx="2">
+            <a:schemeClr val="accent1"/>
+          </a:effectRef>
+          <a:fontRef idx="minor">
+            <a:schemeClr val="lt1"/>
+          </a:fontRef>
+        </p:style>
+        <p:txBody>
+          <a:bodyPr rtlCol="0" anchor="ctr"/>
+          <a:lstStyle/>
+          <a:p>
+            <a:pPr algn="ctr"/>
+          </a:p>
+        </p:txBody>
+      </p:sp>
+      <p:pic>
+        <p:nvPicPr>
+          <p:cNvPr id="12" name="Picture 11" descr="bai1_p10_img369.png"/>
+          <p:cNvPicPr>
+            <a:picLocks noChangeAspect="1"/>
+          </p:cNvPicPr>
+          <p:nvPr/>
+        </p:nvPicPr>
+        <p:blipFill>
+          <a:blip r:embed="rId3"/>
+          <a:stretch>
+            <a:fillRect/>
+          </a:stretch>
+        </p:blipFill>
+        <p:spPr>
+          <a:xfrm>
+            <a:off x="5271516" y="2766060"/>
+            <a:ext cx="1645920" cy="1828800"/>
+          </a:xfrm>
+          <a:prstGeom prst="rect">
+            <a:avLst/>
+          </a:prstGeom>
+        </p:spPr>
+      </p:pic>
+      <p:sp>
+        <p:nvSpPr>
+          <p:cNvPr id="13" name="TextBox 12"/>
+          <p:cNvSpPr txBox="1"/>
+          <p:nvPr/>
+        </p:nvSpPr>
+        <p:spPr>
+          <a:xfrm>
+            <a:off x="4428744" y="4594860"/>
+            <a:ext cx="3331464" cy="822960"/>
+          </a:xfrm>
+          <a:prstGeom prst="rect">
+            <a:avLst/>
+          </a:prstGeom>
+          <a:noFill/>
+        </p:spPr>
+        <p:txBody>
+          <a:bodyPr wrap="square">
+            <a:spAutoFit/>
+          </a:bodyPr>
+          <a:lstStyle/>
+          <a:p>
+            <a:pPr algn="ctr"/>
+            <a:r>
+              <a:rPr sz="1600" b="0">
+                <a:solidFill>
+                  <a:srgbClr val="1E1B4B"/>
+                </a:solidFill>
+                <a:latin typeface="Arial"/>
+              </a:rPr>
+              <a:t>Trình duyệt web Chrome, Edge lướt Internet</a:t>
+            </a:r>
+          </a:p>
+        </p:txBody>
+      </p:sp>
+      <p:sp>
+        <p:nvSpPr>
+          <p:cNvPr id="14" name="Rounded Rectangle 13"/>
+          <p:cNvSpPr/>
+          <p:nvPr/>
+        </p:nvSpPr>
+        <p:spPr>
+          <a:xfrm>
+            <a:off x="8125968" y="2628900"/>
+            <a:ext cx="3605784" cy="2788920"/>
+          </a:xfrm>
+          <a:prstGeom prst="roundRect">
+            <a:avLst/>
+          </a:prstGeom>
+          <a:solidFill>
+            <a:srgbClr val="FFFFFF"/>
+          </a:solidFill>
+          <a:ln w="12700">
+            <a:solidFill>
+              <a:srgbClr val="D0D5DD"/>
+            </a:solidFill>
+          </a:ln>
+        </p:spPr>
+        <p:style>
+          <a:lnRef idx="1">
+            <a:schemeClr val="accent1"/>
+          </a:lnRef>
+          <a:fillRef idx="3">
+            <a:schemeClr val="accent1"/>
+          </a:fillRef>
+          <a:effectRef idx="2">
+            <a:schemeClr val="accent1"/>
+          </a:effectRef>
+          <a:fontRef idx="minor">
+            <a:schemeClr val="lt1"/>
+          </a:fontRef>
+        </p:style>
+        <p:txBody>
+          <a:bodyPr rtlCol="0" anchor="ctr"/>
+          <a:lstStyle/>
+          <a:p>
+            <a:pPr algn="ctr"/>
+          </a:p>
+        </p:txBody>
+      </p:sp>
+      <p:sp>
+        <p:nvSpPr>
+          <p:cNvPr id="15" name="Rectangle 14"/>
+          <p:cNvSpPr/>
+          <p:nvPr/>
+        </p:nvSpPr>
+        <p:spPr>
+          <a:xfrm>
+            <a:off x="8125968" y="2628900"/>
+            <a:ext cx="3605784" cy="91440"/>
+          </a:xfrm>
+          <a:prstGeom prst="rect">
+            <a:avLst/>
+          </a:prstGeom>
+          <a:solidFill>
+            <a:srgbClr val="4F46E5"/>
+          </a:solidFill>
+          <a:ln>
+            <a:noFill/>
+          </a:ln>
+        </p:spPr>
+        <p:style>
+          <a:lnRef idx="1">
+            <a:schemeClr val="accent1"/>
+          </a:lnRef>
+          <a:fillRef idx="3">
+            <a:schemeClr val="accent1"/>
+          </a:fillRef>
+          <a:effectRef idx="2">
+            <a:schemeClr val="accent1"/>
+          </a:effectRef>
+          <a:fontRef idx="minor">
+            <a:schemeClr val="lt1"/>
+          </a:fontRef>
+        </p:style>
+        <p:txBody>
+          <a:bodyPr rtlCol="0" anchor="ctr"/>
+          <a:lstStyle/>
+          <a:p>
+            <a:pPr algn="ctr"/>
+          </a:p>
+        </p:txBody>
+      </p:sp>
+      <p:pic>
+        <p:nvPicPr>
+          <p:cNvPr id="16" name="Picture 15" descr="bai1_p10_img368.png"/>
+          <p:cNvPicPr>
+            <a:picLocks noChangeAspect="1"/>
+          </p:cNvPicPr>
+          <p:nvPr/>
+        </p:nvPicPr>
+        <p:blipFill>
+          <a:blip r:embed="rId2"/>
+          <a:stretch>
+            <a:fillRect/>
+          </a:stretch>
+        </p:blipFill>
+        <p:spPr>
+          <a:xfrm>
+            <a:off x="9105900" y="2766060"/>
+            <a:ext cx="1645920" cy="1828800"/>
+          </a:xfrm>
+          <a:prstGeom prst="rect">
+            <a:avLst/>
+          </a:prstGeom>
+        </p:spPr>
+      </p:pic>
+      <p:sp>
+        <p:nvSpPr>
+          <p:cNvPr id="17" name="TextBox 16"/>
+          <p:cNvSpPr txBox="1"/>
+          <p:nvPr/>
+        </p:nvSpPr>
+        <p:spPr>
+          <a:xfrm>
+            <a:off x="8263128" y="4594860"/>
+            <a:ext cx="3331464" cy="822960"/>
+          </a:xfrm>
+          <a:prstGeom prst="rect">
+            <a:avLst/>
+          </a:prstGeom>
+          <a:noFill/>
+        </p:spPr>
+        <p:txBody>
+          <a:bodyPr wrap="square">
+            <a:spAutoFit/>
+          </a:bodyPr>
+          <a:lstStyle/>
+          <a:p>
+            <a:pPr algn="ctr"/>
+            <a:r>
+              <a:rPr sz="1600" b="0">
+                <a:solidFill>
+                  <a:srgbClr val="1E1B4B"/>
+                </a:solidFill>
+                <a:latin typeface="Arial"/>
+              </a:rPr>
+              <a:t>Phần mềm soạn thảo Word, phần mềm vẽ Paint</a:t>
+            </a:r>
+          </a:p>
+        </p:txBody>
+      </p:sp>
     </p:spTree>
   </p:cSld>
   <p:clrMapOvr>
@@ -4869,7 +5341,7 @@
                 </a:solidFill>
                 <a:latin typeface="Arial"/>
               </a:rPr>
-              <a:t>So sánh: Phần cứng vs Phần mềm</a:t>
+              <a:t>Mối quan hệ Phần cứng &amp; Phần mềm</a:t>
             </a:r>
           </a:p>
         </p:txBody>
@@ -4882,8 +5354,8 @@
         </p:nvSpPr>
         <p:spPr>
           <a:xfrm>
-            <a:off x="365760" y="2286000"/>
-            <a:ext cx="6858000" cy="3383279"/>
+            <a:off x="457200" y="2628900"/>
+            <a:ext cx="3605784" cy="2788920"/>
           </a:xfrm>
           <a:prstGeom prst="roundRect">
             <a:avLst/>
@@ -4891,8 +5363,10 @@
           <a:solidFill>
             <a:srgbClr val="FFFFFF"/>
           </a:solidFill>
-          <a:ln>
-            <a:noFill/>
+          <a:ln w="12700">
+            <a:solidFill>
+              <a:srgbClr val="D0D5DD"/>
+            </a:solidFill>
           </a:ln>
         </p:spPr>
         <p:style>
@@ -4925,8 +5399,8 @@
         </p:nvSpPr>
         <p:spPr>
           <a:xfrm>
-            <a:off x="365760" y="2286000"/>
-            <a:ext cx="109728" cy="3383279"/>
+            <a:off x="457200" y="2628900"/>
+            <a:ext cx="3605784" cy="91440"/>
           </a:xfrm>
           <a:prstGeom prst="rect">
             <a:avLst/>
@@ -4960,128 +5434,9 @@
           </a:p>
         </p:txBody>
       </p:sp>
-      <p:sp>
-        <p:nvSpPr>
-          <p:cNvPr id="8" name="TextBox 7"/>
-          <p:cNvSpPr txBox="1"/>
-          <p:nvPr/>
-        </p:nvSpPr>
-        <p:spPr>
-          <a:xfrm>
-            <a:off x="731520" y="2423160"/>
-            <a:ext cx="6309360" cy="3108960"/>
-          </a:xfrm>
-          <a:prstGeom prst="rect">
-            <a:avLst/>
-          </a:prstGeom>
-          <a:noFill/>
-        </p:spPr>
-        <p:txBody>
-          <a:bodyPr wrap="square">
-            <a:spAutoFit/>
-          </a:bodyPr>
-          <a:lstStyle/>
-          <a:p>
-            <a:pPr algn="l">
-              <a:spcAft>
-                <a:spcPts val="600"/>
-              </a:spcAft>
-            </a:pPr>
-            <a:r>
-              <a:rPr sz="1800" b="0">
-                <a:solidFill>
-                  <a:srgbClr val="1E1B4B"/>
-                </a:solidFill>
-                <a:latin typeface="Arial"/>
-              </a:rPr>
-              <a:t>Phần cứng → Như CƠ THỂ người</a:t>
-            </a:r>
-          </a:p>
-          <a:p>
-            <a:pPr algn="l">
-              <a:spcAft>
-                <a:spcPts val="600"/>
-              </a:spcAft>
-            </a:pPr>
-            <a:r>
-              <a:rPr sz="1800" b="0">
-                <a:solidFill>
-                  <a:srgbClr val="1E1B4B"/>
-                </a:solidFill>
-                <a:latin typeface="Arial"/>
-              </a:rPr>
-              <a:t>Phần mềm → Như TRÍ ÓC người</a:t>
-            </a:r>
-          </a:p>
-          <a:p>
-            <a:pPr algn="l">
-              <a:spcAft>
-                <a:spcPts val="600"/>
-              </a:spcAft>
-            </a:pPr>
-            <a:r>
-              <a:rPr sz="1800" b="0">
-                <a:solidFill>
-                  <a:srgbClr val="1E1B4B"/>
-                </a:solidFill>
-                <a:latin typeface="Arial"/>
-              </a:rPr>
-              <a:t/>
-            </a:r>
-          </a:p>
-          <a:p>
-            <a:pPr algn="l">
-              <a:spcAft>
-                <a:spcPts val="600"/>
-              </a:spcAft>
-            </a:pPr>
-            <a:r>
-              <a:rPr sz="1800" b="0">
-                <a:solidFill>
-                  <a:srgbClr val="1E1B4B"/>
-                </a:solidFill>
-                <a:latin typeface="Arial"/>
-              </a:rPr>
-              <a:t>Máy tính cần CẢ HAI mới hoạt động được!</a:t>
-            </a:r>
-          </a:p>
-          <a:p>
-            <a:pPr algn="l">
-              <a:spcAft>
-                <a:spcPts val="600"/>
-              </a:spcAft>
-            </a:pPr>
-            <a:r>
-              <a:rPr sz="1800" b="0">
-                <a:solidFill>
-                  <a:srgbClr val="1E1B4B"/>
-                </a:solidFill>
-                <a:latin typeface="Arial"/>
-              </a:rPr>
-              <a:t>Không có phần cứng → không có máy</a:t>
-            </a:r>
-          </a:p>
-          <a:p>
-            <a:pPr algn="l">
-              <a:spcAft>
-                <a:spcPts val="600"/>
-              </a:spcAft>
-            </a:pPr>
-            <a:r>
-              <a:rPr sz="1800" b="0">
-                <a:solidFill>
-                  <a:srgbClr val="1E1B4B"/>
-                </a:solidFill>
-                <a:latin typeface="Arial"/>
-              </a:rPr>
-              <a:t>Không có phần mềm → máy không biết làm gì</a:t>
-            </a:r>
-          </a:p>
-        </p:txBody>
-      </p:sp>
       <p:pic>
         <p:nvPicPr>
-          <p:cNvPr id="9" name="Picture 8" descr="bai1_p10_img368.png"/>
+          <p:cNvPr id="8" name="Picture 7" descr="bai1_p10_img369.png"/>
           <p:cNvPicPr>
             <a:picLocks noChangeAspect="1"/>
           </p:cNvPicPr>
@@ -5095,21 +5450,350 @@
         </p:blipFill>
         <p:spPr>
           <a:xfrm>
-            <a:off x="7589520" y="2286000"/>
-            <a:ext cx="4114799" cy="3383279"/>
+            <a:off x="1437132" y="2766060"/>
+            <a:ext cx="1645920" cy="1828800"/>
           </a:xfrm>
           <a:prstGeom prst="rect">
             <a:avLst/>
           </a:prstGeom>
         </p:spPr>
       </p:pic>
+      <p:sp>
+        <p:nvSpPr>
+          <p:cNvPr id="9" name="TextBox 8"/>
+          <p:cNvSpPr txBox="1"/>
+          <p:nvPr/>
+        </p:nvSpPr>
+        <p:spPr>
+          <a:xfrm>
+            <a:off x="594360" y="4594860"/>
+            <a:ext cx="3331464" cy="822960"/>
+          </a:xfrm>
+          <a:prstGeom prst="rect">
+            <a:avLst/>
+          </a:prstGeom>
+          <a:noFill/>
+        </p:spPr>
+        <p:txBody>
+          <a:bodyPr wrap="square">
+            <a:spAutoFit/>
+          </a:bodyPr>
+          <a:lstStyle/>
+          <a:p>
+            <a:pPr algn="ctr"/>
+            <a:r>
+              <a:rPr sz="1600" b="0">
+                <a:solidFill>
+                  <a:srgbClr val="1E1B4B"/>
+                </a:solidFill>
+                <a:latin typeface="Arial"/>
+              </a:rPr>
+              <a:t>Phần cứng như CƠ THỂ của máy tính</a:t>
+            </a:r>
+          </a:p>
+        </p:txBody>
+      </p:sp>
+      <p:sp>
+        <p:nvSpPr>
+          <p:cNvPr id="10" name="Rounded Rectangle 9"/>
+          <p:cNvSpPr/>
+          <p:nvPr/>
+        </p:nvSpPr>
+        <p:spPr>
+          <a:xfrm>
+            <a:off x="4291584" y="2628900"/>
+            <a:ext cx="3605784" cy="2788920"/>
+          </a:xfrm>
+          <a:prstGeom prst="roundRect">
+            <a:avLst/>
+          </a:prstGeom>
+          <a:solidFill>
+            <a:srgbClr val="FFFFFF"/>
+          </a:solidFill>
+          <a:ln w="12700">
+            <a:solidFill>
+              <a:srgbClr val="D0D5DD"/>
+            </a:solidFill>
+          </a:ln>
+        </p:spPr>
+        <p:style>
+          <a:lnRef idx="1">
+            <a:schemeClr val="accent1"/>
+          </a:lnRef>
+          <a:fillRef idx="3">
+            <a:schemeClr val="accent1"/>
+          </a:fillRef>
+          <a:effectRef idx="2">
+            <a:schemeClr val="accent1"/>
+          </a:effectRef>
+          <a:fontRef idx="minor">
+            <a:schemeClr val="lt1"/>
+          </a:fontRef>
+        </p:style>
+        <p:txBody>
+          <a:bodyPr rtlCol="0" anchor="ctr"/>
+          <a:lstStyle/>
+          <a:p>
+            <a:pPr algn="ctr"/>
+          </a:p>
+        </p:txBody>
+      </p:sp>
+      <p:sp>
+        <p:nvSpPr>
+          <p:cNvPr id="11" name="Rectangle 10"/>
+          <p:cNvSpPr/>
+          <p:nvPr/>
+        </p:nvSpPr>
+        <p:spPr>
+          <a:xfrm>
+            <a:off x="4291584" y="2628900"/>
+            <a:ext cx="3605784" cy="91440"/>
+          </a:xfrm>
+          <a:prstGeom prst="rect">
+            <a:avLst/>
+          </a:prstGeom>
+          <a:solidFill>
+            <a:srgbClr val="4F46E5"/>
+          </a:solidFill>
+          <a:ln>
+            <a:noFill/>
+          </a:ln>
+        </p:spPr>
+        <p:style>
+          <a:lnRef idx="1">
+            <a:schemeClr val="accent1"/>
+          </a:lnRef>
+          <a:fillRef idx="3">
+            <a:schemeClr val="accent1"/>
+          </a:fillRef>
+          <a:effectRef idx="2">
+            <a:schemeClr val="accent1"/>
+          </a:effectRef>
+          <a:fontRef idx="minor">
+            <a:schemeClr val="lt1"/>
+          </a:fontRef>
+        </p:style>
+        <p:txBody>
+          <a:bodyPr rtlCol="0" anchor="ctr"/>
+          <a:lstStyle/>
+          <a:p>
+            <a:pPr algn="ctr"/>
+          </a:p>
+        </p:txBody>
+      </p:sp>
+      <p:pic>
+        <p:nvPicPr>
+          <p:cNvPr id="12" name="Picture 11" descr="bai1_p10_img368.png"/>
+          <p:cNvPicPr>
+            <a:picLocks noChangeAspect="1"/>
+          </p:cNvPicPr>
+          <p:nvPr/>
+        </p:nvPicPr>
+        <p:blipFill>
+          <a:blip r:embed="rId3"/>
+          <a:stretch>
+            <a:fillRect/>
+          </a:stretch>
+        </p:blipFill>
+        <p:spPr>
+          <a:xfrm>
+            <a:off x="5271516" y="2766060"/>
+            <a:ext cx="1645920" cy="1828800"/>
+          </a:xfrm>
+          <a:prstGeom prst="rect">
+            <a:avLst/>
+          </a:prstGeom>
+        </p:spPr>
+      </p:pic>
+      <p:sp>
+        <p:nvSpPr>
+          <p:cNvPr id="13" name="TextBox 12"/>
+          <p:cNvSpPr txBox="1"/>
+          <p:nvPr/>
+        </p:nvSpPr>
+        <p:spPr>
+          <a:xfrm>
+            <a:off x="4428744" y="4594860"/>
+            <a:ext cx="3331464" cy="822960"/>
+          </a:xfrm>
+          <a:prstGeom prst="rect">
+            <a:avLst/>
+          </a:prstGeom>
+          <a:noFill/>
+        </p:spPr>
+        <p:txBody>
+          <a:bodyPr wrap="square">
+            <a:spAutoFit/>
+          </a:bodyPr>
+          <a:lstStyle/>
+          <a:p>
+            <a:pPr algn="ctr"/>
+            <a:r>
+              <a:rPr sz="1600" b="0">
+                <a:solidFill>
+                  <a:srgbClr val="1E1B4B"/>
+                </a:solidFill>
+                <a:latin typeface="Arial"/>
+              </a:rPr>
+              <a:t>Phần mềm như TRÍ ÓC điều khiển máy tính</a:t>
+            </a:r>
+          </a:p>
+        </p:txBody>
+      </p:sp>
+      <p:sp>
+        <p:nvSpPr>
+          <p:cNvPr id="14" name="Rounded Rectangle 13"/>
+          <p:cNvSpPr/>
+          <p:nvPr/>
+        </p:nvSpPr>
+        <p:spPr>
+          <a:xfrm>
+            <a:off x="8125968" y="2628900"/>
+            <a:ext cx="3605784" cy="2788920"/>
+          </a:xfrm>
+          <a:prstGeom prst="roundRect">
+            <a:avLst/>
+          </a:prstGeom>
+          <a:solidFill>
+            <a:srgbClr val="FFFFFF"/>
+          </a:solidFill>
+          <a:ln w="12700">
+            <a:solidFill>
+              <a:srgbClr val="D0D5DD"/>
+            </a:solidFill>
+          </a:ln>
+        </p:spPr>
+        <p:style>
+          <a:lnRef idx="1">
+            <a:schemeClr val="accent1"/>
+          </a:lnRef>
+          <a:fillRef idx="3">
+            <a:schemeClr val="accent1"/>
+          </a:fillRef>
+          <a:effectRef idx="2">
+            <a:schemeClr val="accent1"/>
+          </a:effectRef>
+          <a:fontRef idx="minor">
+            <a:schemeClr val="lt1"/>
+          </a:fontRef>
+        </p:style>
+        <p:txBody>
+          <a:bodyPr rtlCol="0" anchor="ctr"/>
+          <a:lstStyle/>
+          <a:p>
+            <a:pPr algn="ctr"/>
+          </a:p>
+        </p:txBody>
+      </p:sp>
+      <p:sp>
+        <p:nvSpPr>
+          <p:cNvPr id="15" name="Rectangle 14"/>
+          <p:cNvSpPr/>
+          <p:nvPr/>
+        </p:nvSpPr>
+        <p:spPr>
+          <a:xfrm>
+            <a:off x="8125968" y="2628900"/>
+            <a:ext cx="3605784" cy="91440"/>
+          </a:xfrm>
+          <a:prstGeom prst="rect">
+            <a:avLst/>
+          </a:prstGeom>
+          <a:solidFill>
+            <a:srgbClr val="4F46E5"/>
+          </a:solidFill>
+          <a:ln>
+            <a:noFill/>
+          </a:ln>
+        </p:spPr>
+        <p:style>
+          <a:lnRef idx="1">
+            <a:schemeClr val="accent1"/>
+          </a:lnRef>
+          <a:fillRef idx="3">
+            <a:schemeClr val="accent1"/>
+          </a:fillRef>
+          <a:effectRef idx="2">
+            <a:schemeClr val="accent1"/>
+          </a:effectRef>
+          <a:fontRef idx="minor">
+            <a:schemeClr val="lt1"/>
+          </a:fontRef>
+        </p:style>
+        <p:txBody>
+          <a:bodyPr rtlCol="0" anchor="ctr"/>
+          <a:lstStyle/>
+          <a:p>
+            <a:pPr algn="ctr"/>
+          </a:p>
+        </p:txBody>
+      </p:sp>
+      <p:pic>
+        <p:nvPicPr>
+          <p:cNvPr id="16" name="Picture 15" descr="bai1_p10_img369.png"/>
+          <p:cNvPicPr>
+            <a:picLocks noChangeAspect="1"/>
+          </p:cNvPicPr>
+          <p:nvPr/>
+        </p:nvPicPr>
+        <p:blipFill>
+          <a:blip r:embed="rId2"/>
+          <a:stretch>
+            <a:fillRect/>
+          </a:stretch>
+        </p:blipFill>
+        <p:spPr>
+          <a:xfrm>
+            <a:off x="9105900" y="2766060"/>
+            <a:ext cx="1645920" cy="1828800"/>
+          </a:xfrm>
+          <a:prstGeom prst="rect">
+            <a:avLst/>
+          </a:prstGeom>
+        </p:spPr>
+      </p:pic>
+      <p:sp>
+        <p:nvSpPr>
+          <p:cNvPr id="17" name="TextBox 16"/>
+          <p:cNvSpPr txBox="1"/>
+          <p:nvPr/>
+        </p:nvSpPr>
+        <p:spPr>
+          <a:xfrm>
+            <a:off x="8263128" y="4594860"/>
+            <a:ext cx="3331464" cy="822960"/>
+          </a:xfrm>
+          <a:prstGeom prst="rect">
+            <a:avLst/>
+          </a:prstGeom>
+          <a:noFill/>
+        </p:spPr>
+        <p:txBody>
+          <a:bodyPr wrap="square">
+            <a:spAutoFit/>
+          </a:bodyPr>
+          <a:lstStyle/>
+          <a:p>
+            <a:pPr algn="ctr"/>
+            <a:r>
+              <a:rPr sz="1600" b="0">
+                <a:solidFill>
+                  <a:srgbClr val="1E1B4B"/>
+                </a:solidFill>
+                <a:latin typeface="Arial"/>
+              </a:rPr>
+              <a:t>Máy tính cần CẢ HAI để hoạt động</a:t>
+            </a:r>
+          </a:p>
+        </p:txBody>
+      </p:sp>
     </p:spTree>
   </p:cSld>
   <p:clrMapOvr>
     <a:masterClrMapping/>
   </p:clrMapOvr>
   <p:transition spd="med">
-    <p:fade/>
+    <p:wipe/>
   </p:transition>
 </p:sld>
 </file>
@@ -5289,7 +5973,7 @@
         <p:spPr>
           <a:xfrm>
             <a:off x="457200" y="2286000"/>
-            <a:ext cx="11274552" cy="822960"/>
+            <a:ext cx="11274552" cy="640080"/>
           </a:xfrm>
           <a:prstGeom prst="rect">
             <a:avLst/>
@@ -5308,13 +5992,13 @@
               </a:spcAft>
             </a:pPr>
             <a:r>
-              <a:rPr sz="1700" b="0">
+              <a:rPr sz="1800" b="0">
                 <a:solidFill>
                   <a:srgbClr val="1E1B4B"/>
                 </a:solidFill>
                 <a:latin typeface="Arial"/>
               </a:rPr>
-              <a:t>Đâu là phần cứng? Đâu là phần mềm?</a:t>
+              <a:t>Phân loại từng thiết bị/chương trình:</a:t>
             </a:r>
           </a:p>
         </p:txBody>
@@ -5327,8 +6011,8 @@
         </p:nvSpPr>
         <p:spPr>
           <a:xfrm>
-            <a:off x="457200" y="3200400"/>
-            <a:ext cx="5545836" cy="548639"/>
+            <a:off x="457200" y="3017520"/>
+            <a:ext cx="5522976" cy="1280159"/>
           </a:xfrm>
           <a:prstGeom prst="roundRect">
             <a:avLst/>
@@ -5364,16 +6048,40 @@
           </a:p>
         </p:txBody>
       </p:sp>
-      <p:sp>
-        <p:nvSpPr>
-          <p:cNvPr id="8" name="TextBox 7"/>
+      <p:pic>
+        <p:nvPicPr>
+          <p:cNvPr id="8" name="Picture 7" descr="bai1_p10_img297.jpeg"/>
+          <p:cNvPicPr>
+            <a:picLocks noChangeAspect="1"/>
+          </p:cNvPicPr>
+          <p:nvPr/>
+        </p:nvPicPr>
+        <p:blipFill>
+          <a:blip r:embed="rId2"/>
+          <a:stretch>
+            <a:fillRect/>
+          </a:stretch>
+        </p:blipFill>
+        <p:spPr>
+          <a:xfrm>
+            <a:off x="640080" y="3154679"/>
+            <a:ext cx="1280160" cy="1005840"/>
+          </a:xfrm>
+          <a:prstGeom prst="rect">
+            <a:avLst/>
+          </a:prstGeom>
+        </p:spPr>
+      </p:pic>
+      <p:sp>
+        <p:nvSpPr>
+          <p:cNvPr id="9" name="TextBox 8"/>
           <p:cNvSpPr txBox="1"/>
           <p:nvPr/>
         </p:nvSpPr>
         <p:spPr>
           <a:xfrm>
-            <a:off x="685800" y="3291840"/>
-            <a:ext cx="5180076" cy="365760"/>
+            <a:off x="2103120" y="3154679"/>
+            <a:ext cx="3785616" cy="1005839"/>
           </a:xfrm>
           <a:prstGeom prst="rect">
             <a:avLst/>
@@ -5388,27 +6096,27 @@
           <a:p>
             <a:pPr algn="l"/>
             <a:r>
-              <a:rPr sz="1500" b="0">
+              <a:rPr sz="1600" b="1">
                 <a:solidFill>
                   <a:srgbClr val="1E1B4B"/>
                 </a:solidFill>
                 <a:latin typeface="Arial"/>
               </a:rPr>
-              <a:t>Bàn phím → ?</a:t>
-            </a:r>
-          </a:p>
-        </p:txBody>
-      </p:sp>
-      <p:sp>
-        <p:nvSpPr>
-          <p:cNvPr id="9" name="Rounded Rectangle 8"/>
+              <a:t>Bàn phím ↔ Phần cứng</a:t>
+            </a:r>
+          </a:p>
+        </p:txBody>
+      </p:sp>
+      <p:sp>
+        <p:nvSpPr>
+          <p:cNvPr id="10" name="Rounded Rectangle 9"/>
           <p:cNvSpPr/>
           <p:nvPr/>
         </p:nvSpPr>
         <p:spPr>
           <a:xfrm>
-            <a:off x="6185916" y="3200400"/>
-            <a:ext cx="5545836" cy="548639"/>
+            <a:off x="6208776" y="3017520"/>
+            <a:ext cx="5522976" cy="1280159"/>
           </a:xfrm>
           <a:prstGeom prst="roundRect">
             <a:avLst/>
@@ -5444,16 +6152,40 @@
           </a:p>
         </p:txBody>
       </p:sp>
-      <p:sp>
-        <p:nvSpPr>
-          <p:cNvPr id="10" name="TextBox 9"/>
+      <p:pic>
+        <p:nvPicPr>
+          <p:cNvPr id="11" name="Picture 10" descr="bai1_p10_img368.png"/>
+          <p:cNvPicPr>
+            <a:picLocks noChangeAspect="1"/>
+          </p:cNvPicPr>
+          <p:nvPr/>
+        </p:nvPicPr>
+        <p:blipFill>
+          <a:blip r:embed="rId3"/>
+          <a:stretch>
+            <a:fillRect/>
+          </a:stretch>
+        </p:blipFill>
+        <p:spPr>
+          <a:xfrm>
+            <a:off x="6391656" y="3154679"/>
+            <a:ext cx="1280160" cy="1005840"/>
+          </a:xfrm>
+          <a:prstGeom prst="rect">
+            <a:avLst/>
+          </a:prstGeom>
+        </p:spPr>
+      </p:pic>
+      <p:sp>
+        <p:nvSpPr>
+          <p:cNvPr id="12" name="TextBox 11"/>
           <p:cNvSpPr txBox="1"/>
           <p:nvPr/>
         </p:nvSpPr>
         <p:spPr>
           <a:xfrm>
-            <a:off x="6414516" y="3291840"/>
-            <a:ext cx="5180076" cy="365760"/>
+            <a:off x="7854696" y="3154679"/>
+            <a:ext cx="3785616" cy="1005839"/>
           </a:xfrm>
           <a:prstGeom prst="rect">
             <a:avLst/>
@@ -5468,27 +6200,27 @@
           <a:p>
             <a:pPr algn="l"/>
             <a:r>
-              <a:rPr sz="1500" b="0">
+              <a:rPr sz="1600" b="1">
                 <a:solidFill>
                   <a:srgbClr val="1E1B4B"/>
                 </a:solidFill>
                 <a:latin typeface="Arial"/>
               </a:rPr>
-              <a:t>Microsoft Word → ?</a:t>
-            </a:r>
-          </a:p>
-        </p:txBody>
-      </p:sp>
-      <p:sp>
-        <p:nvSpPr>
-          <p:cNvPr id="11" name="Rounded Rectangle 10"/>
+              <a:t>Microsoft Word ↔ Phần mềm</a:t>
+            </a:r>
+          </a:p>
+        </p:txBody>
+      </p:sp>
+      <p:sp>
+        <p:nvSpPr>
+          <p:cNvPr id="13" name="Rounded Rectangle 12"/>
           <p:cNvSpPr/>
           <p:nvPr/>
         </p:nvSpPr>
         <p:spPr>
           <a:xfrm>
-            <a:off x="457200" y="3886200"/>
-            <a:ext cx="5545836" cy="548639"/>
+            <a:off x="457200" y="4526279"/>
+            <a:ext cx="5522976" cy="1280160"/>
           </a:xfrm>
           <a:prstGeom prst="roundRect">
             <a:avLst/>
@@ -5524,16 +6256,40 @@
           </a:p>
         </p:txBody>
       </p:sp>
-      <p:sp>
-        <p:nvSpPr>
-          <p:cNvPr id="12" name="TextBox 11"/>
+      <p:pic>
+        <p:nvPicPr>
+          <p:cNvPr id="14" name="Picture 13" descr="bai1_p10_img369.png"/>
+          <p:cNvPicPr>
+            <a:picLocks noChangeAspect="1"/>
+          </p:cNvPicPr>
+          <p:nvPr/>
+        </p:nvPicPr>
+        <p:blipFill>
+          <a:blip r:embed="rId4"/>
+          <a:stretch>
+            <a:fillRect/>
+          </a:stretch>
+        </p:blipFill>
+        <p:spPr>
+          <a:xfrm>
+            <a:off x="640080" y="4663440"/>
+            <a:ext cx="1280160" cy="1005839"/>
+          </a:xfrm>
+          <a:prstGeom prst="rect">
+            <a:avLst/>
+          </a:prstGeom>
+        </p:spPr>
+      </p:pic>
+      <p:sp>
+        <p:nvSpPr>
+          <p:cNvPr id="15" name="TextBox 14"/>
           <p:cNvSpPr txBox="1"/>
           <p:nvPr/>
         </p:nvSpPr>
         <p:spPr>
           <a:xfrm>
-            <a:off x="685800" y="3977639"/>
-            <a:ext cx="5180076" cy="365760"/>
+            <a:off x="2103120" y="4663440"/>
+            <a:ext cx="3785616" cy="1005839"/>
           </a:xfrm>
           <a:prstGeom prst="rect">
             <a:avLst/>
@@ -5548,27 +6304,27 @@
           <a:p>
             <a:pPr algn="l"/>
             <a:r>
-              <a:rPr sz="1500" b="0">
+              <a:rPr sz="1600" b="1">
                 <a:solidFill>
                   <a:srgbClr val="1E1B4B"/>
                 </a:solidFill>
                 <a:latin typeface="Arial"/>
               </a:rPr>
-              <a:t>Chuột → ?</a:t>
-            </a:r>
-          </a:p>
-        </p:txBody>
-      </p:sp>
-      <p:sp>
-        <p:nvSpPr>
-          <p:cNvPr id="13" name="Rounded Rectangle 12"/>
+              <a:t>Chuột máy tính ↔ Phần cứng</a:t>
+            </a:r>
+          </a:p>
+        </p:txBody>
+      </p:sp>
+      <p:sp>
+        <p:nvSpPr>
+          <p:cNvPr id="16" name="Rounded Rectangle 15"/>
           <p:cNvSpPr/>
           <p:nvPr/>
         </p:nvSpPr>
         <p:spPr>
           <a:xfrm>
-            <a:off x="6185916" y="3886200"/>
-            <a:ext cx="5545836" cy="548639"/>
+            <a:off x="6208776" y="4526279"/>
+            <a:ext cx="5522976" cy="1280160"/>
           </a:xfrm>
           <a:prstGeom prst="roundRect">
             <a:avLst/>
@@ -5604,16 +6360,40 @@
           </a:p>
         </p:txBody>
       </p:sp>
-      <p:sp>
-        <p:nvSpPr>
-          <p:cNvPr id="14" name="TextBox 13"/>
+      <p:pic>
+        <p:nvPicPr>
+          <p:cNvPr id="17" name="Picture 16" descr="bai1_p10_img368.png"/>
+          <p:cNvPicPr>
+            <a:picLocks noChangeAspect="1"/>
+          </p:cNvPicPr>
+          <p:nvPr/>
+        </p:nvPicPr>
+        <p:blipFill>
+          <a:blip r:embed="rId3"/>
+          <a:stretch>
+            <a:fillRect/>
+          </a:stretch>
+        </p:blipFill>
+        <p:spPr>
+          <a:xfrm>
+            <a:off x="6391656" y="4663440"/>
+            <a:ext cx="1280160" cy="1005839"/>
+          </a:xfrm>
+          <a:prstGeom prst="rect">
+            <a:avLst/>
+          </a:prstGeom>
+        </p:spPr>
+      </p:pic>
+      <p:sp>
+        <p:nvSpPr>
+          <p:cNvPr id="18" name="TextBox 17"/>
           <p:cNvSpPr txBox="1"/>
           <p:nvPr/>
         </p:nvSpPr>
         <p:spPr>
           <a:xfrm>
-            <a:off x="6414516" y="3977639"/>
-            <a:ext cx="5180076" cy="365760"/>
+            <a:off x="7854696" y="4663440"/>
+            <a:ext cx="3785616" cy="1005839"/>
           </a:xfrm>
           <a:prstGeom prst="rect">
             <a:avLst/>
@@ -5628,173 +6408,13 @@
           <a:p>
             <a:pPr algn="l"/>
             <a:r>
-              <a:rPr sz="1500" b="0">
+              <a:rPr sz="1600" b="1">
                 <a:solidFill>
                   <a:srgbClr val="1E1B4B"/>
                 </a:solidFill>
                 <a:latin typeface="Arial"/>
               </a:rPr>
-              <a:t>Minecraft → ?</a:t>
-            </a:r>
-          </a:p>
-        </p:txBody>
-      </p:sp>
-      <p:sp>
-        <p:nvSpPr>
-          <p:cNvPr id="15" name="Rounded Rectangle 14"/>
-          <p:cNvSpPr/>
-          <p:nvPr/>
-        </p:nvSpPr>
-        <p:spPr>
-          <a:xfrm>
-            <a:off x="457200" y="4572000"/>
-            <a:ext cx="5545836" cy="548639"/>
-          </a:xfrm>
-          <a:prstGeom prst="roundRect">
-            <a:avLst/>
-          </a:prstGeom>
-          <a:solidFill>
-            <a:srgbClr val="FFFFFF"/>
-          </a:solidFill>
-          <a:ln w="12700">
-            <a:solidFill>
-              <a:srgbClr val="4F46E5"/>
-            </a:solidFill>
-          </a:ln>
-        </p:spPr>
-        <p:style>
-          <a:lnRef idx="1">
-            <a:schemeClr val="accent1"/>
-          </a:lnRef>
-          <a:fillRef idx="3">
-            <a:schemeClr val="accent1"/>
-          </a:fillRef>
-          <a:effectRef idx="2">
-            <a:schemeClr val="accent1"/>
-          </a:effectRef>
-          <a:fontRef idx="minor">
-            <a:schemeClr val="lt1"/>
-          </a:fontRef>
-        </p:style>
-        <p:txBody>
-          <a:bodyPr rtlCol="0" anchor="ctr"/>
-          <a:lstStyle/>
-          <a:p>
-            <a:pPr algn="ctr"/>
-          </a:p>
-        </p:txBody>
-      </p:sp>
-      <p:sp>
-        <p:nvSpPr>
-          <p:cNvPr id="16" name="TextBox 15"/>
-          <p:cNvSpPr txBox="1"/>
-          <p:nvPr/>
-        </p:nvSpPr>
-        <p:spPr>
-          <a:xfrm>
-            <a:off x="685800" y="4663440"/>
-            <a:ext cx="5180076" cy="365760"/>
-          </a:xfrm>
-          <a:prstGeom prst="rect">
-            <a:avLst/>
-          </a:prstGeom>
-          <a:noFill/>
-        </p:spPr>
-        <p:txBody>
-          <a:bodyPr wrap="square">
-            <a:spAutoFit/>
-          </a:bodyPr>
-          <a:lstStyle/>
-          <a:p>
-            <a:pPr algn="l"/>
-            <a:r>
-              <a:rPr sz="1500" b="0">
-                <a:solidFill>
-                  <a:srgbClr val="1E1B4B"/>
-                </a:solidFill>
-                <a:latin typeface="Arial"/>
-              </a:rPr>
-              <a:t>Loa → ?</a:t>
-            </a:r>
-          </a:p>
-        </p:txBody>
-      </p:sp>
-      <p:sp>
-        <p:nvSpPr>
-          <p:cNvPr id="17" name="Rounded Rectangle 16"/>
-          <p:cNvSpPr/>
-          <p:nvPr/>
-        </p:nvSpPr>
-        <p:spPr>
-          <a:xfrm>
-            <a:off x="6185916" y="4572000"/>
-            <a:ext cx="5545836" cy="548639"/>
-          </a:xfrm>
-          <a:prstGeom prst="roundRect">
-            <a:avLst/>
-          </a:prstGeom>
-          <a:solidFill>
-            <a:srgbClr val="FFFFFF"/>
-          </a:solidFill>
-          <a:ln w="12700">
-            <a:solidFill>
-              <a:srgbClr val="4F46E5"/>
-            </a:solidFill>
-          </a:ln>
-        </p:spPr>
-        <p:style>
-          <a:lnRef idx="1">
-            <a:schemeClr val="accent1"/>
-          </a:lnRef>
-          <a:fillRef idx="3">
-            <a:schemeClr val="accent1"/>
-          </a:fillRef>
-          <a:effectRef idx="2">
-            <a:schemeClr val="accent1"/>
-          </a:effectRef>
-          <a:fontRef idx="minor">
-            <a:schemeClr val="lt1"/>
-          </a:fontRef>
-        </p:style>
-        <p:txBody>
-          <a:bodyPr rtlCol="0" anchor="ctr"/>
-          <a:lstStyle/>
-          <a:p>
-            <a:pPr algn="ctr"/>
-          </a:p>
-        </p:txBody>
-      </p:sp>
-      <p:sp>
-        <p:nvSpPr>
-          <p:cNvPr id="18" name="TextBox 17"/>
-          <p:cNvSpPr txBox="1"/>
-          <p:nvPr/>
-        </p:nvSpPr>
-        <p:spPr>
-          <a:xfrm>
-            <a:off x="6414516" y="4663440"/>
-            <a:ext cx="5180076" cy="365760"/>
-          </a:xfrm>
-          <a:prstGeom prst="rect">
-            <a:avLst/>
-          </a:prstGeom>
-          <a:noFill/>
-        </p:spPr>
-        <p:txBody>
-          <a:bodyPr wrap="square">
-            <a:spAutoFit/>
-          </a:bodyPr>
-          <a:lstStyle/>
-          <a:p>
-            <a:pPr algn="l"/>
-            <a:r>
-              <a:rPr sz="1500" b="0">
-                <a:solidFill>
-                  <a:srgbClr val="1E1B4B"/>
-                </a:solidFill>
-                <a:latin typeface="Arial"/>
-              </a:rPr>
-              <a:t>Chrome → ?</a:t>
+              <a:t>Trình duyệt Chrome ↔ Phần mềm</a:t>
             </a:r>
           </a:p>
         </p:txBody>
@@ -5804,6 +6424,396 @@
   <p:clrMapOvr>
     <a:masterClrMapping/>
   </p:clrMapOvr>
+  <p:timing>
+    <p:tnLst>
+      <p:par>
+        <p:cTn id="1" dur="indefinite" restart="never" nodeType="tmRoot">
+          <p:childTnLst>
+            <p:seq concurrent="1" nextAc="seek">
+              <p:cTn id="2" dur="indefinite" nodeType="mainSeq">
+                <p:childTnLst>
+                  <p:par>
+                    <p:cTn id="3" fill="hold">
+                      <p:stCondLst>
+                        <p:cond delay="0"/>
+                      </p:stCondLst>
+                      <p:childTnLst>
+                        <p:par>
+                          <p:cTn id="4" presetID="1" presetClass="entr" presetSubtype="0" fill="hold">
+                            <p:stCondLst>
+                              <p:cond delay="0"/>
+                            </p:stCondLst>
+                            <p:childTnLst>
+                              <p:set>
+                                <p:cBhvr>
+                                  <p:cTn id="5" dur="1" fill="hold">
+                                    <p:stCondLst>
+                                      <p:cond delay="0"/>
+                                    </p:stCondLst>
+                                  </p:cTn>
+                                  <p:tgtEl>
+                                    <p:spTgt spid="7"/>
+                                  </p:tgtEl>
+                                  <p:attrNameLst>
+                                    <p:attrName>style.visibility</p:attrName>
+                                  </p:attrNameLst>
+                                </p:cBhvr>
+                                <p:to>
+                                  <p:strVal val="visible"/>
+                                </p:to>
+                              </p:set>
+                            </p:childTnLst>
+                          </p:cTn>
+                        </p:par>
+                        <p:par>
+                          <p:cTn id="6" presetID="1" presetClass="entr" presetSubtype="0" fill="hold">
+                            <p:stCondLst>
+                              <p:cond delay="0"/>
+                            </p:stCondLst>
+                            <p:childTnLst>
+                              <p:set>
+                                <p:cBhvr>
+                                  <p:cTn id="7" dur="1" fill="hold">
+                                    <p:stCondLst>
+                                      <p:cond delay="0"/>
+                                    </p:stCondLst>
+                                  </p:cTn>
+                                  <p:tgtEl>
+                                    <p:spTgt spid="8"/>
+                                  </p:tgtEl>
+                                  <p:attrNameLst>
+                                    <p:attrName>style.visibility</p:attrName>
+                                  </p:attrNameLst>
+                                </p:cBhvr>
+                                <p:to>
+                                  <p:strVal val="visible"/>
+                                </p:to>
+                              </p:set>
+                            </p:childTnLst>
+                          </p:cTn>
+                        </p:par>
+                        <p:par>
+                          <p:cTn id="8" presetID="1" presetClass="entr" presetSubtype="0" fill="hold">
+                            <p:stCondLst>
+                              <p:cond delay="0"/>
+                            </p:stCondLst>
+                            <p:childTnLst>
+                              <p:set>
+                                <p:cBhvr>
+                                  <p:cTn id="9" dur="1" fill="hold">
+                                    <p:stCondLst>
+                                      <p:cond delay="0"/>
+                                    </p:stCondLst>
+                                  </p:cTn>
+                                  <p:tgtEl>
+                                    <p:spTgt spid="9"/>
+                                  </p:tgtEl>
+                                  <p:attrNameLst>
+                                    <p:attrName>style.visibility</p:attrName>
+                                  </p:attrNameLst>
+                                </p:cBhvr>
+                                <p:to>
+                                  <p:strVal val="visible"/>
+                                </p:to>
+                              </p:set>
+                            </p:childTnLst>
+                          </p:cTn>
+                        </p:par>
+                      </p:childTnLst>
+                    </p:cTn>
+                  </p:par>
+                  <p:par>
+                    <p:cTn id="10" fill="hold">
+                      <p:stCondLst>
+                        <p:cond delay="0"/>
+                      </p:stCondLst>
+                      <p:childTnLst>
+                        <p:par>
+                          <p:cTn id="11" presetID="1" presetClass="entr" presetSubtype="0" fill="hold">
+                            <p:stCondLst>
+                              <p:cond delay="0"/>
+                            </p:stCondLst>
+                            <p:childTnLst>
+                              <p:set>
+                                <p:cBhvr>
+                                  <p:cTn id="12" dur="1" fill="hold">
+                                    <p:stCondLst>
+                                      <p:cond delay="0"/>
+                                    </p:stCondLst>
+                                  </p:cTn>
+                                  <p:tgtEl>
+                                    <p:spTgt spid="10"/>
+                                  </p:tgtEl>
+                                  <p:attrNameLst>
+                                    <p:attrName>style.visibility</p:attrName>
+                                  </p:attrNameLst>
+                                </p:cBhvr>
+                                <p:to>
+                                  <p:strVal val="visible"/>
+                                </p:to>
+                              </p:set>
+                            </p:childTnLst>
+                          </p:cTn>
+                        </p:par>
+                        <p:par>
+                          <p:cTn id="13" presetID="1" presetClass="entr" presetSubtype="0" fill="hold">
+                            <p:stCondLst>
+                              <p:cond delay="0"/>
+                            </p:stCondLst>
+                            <p:childTnLst>
+                              <p:set>
+                                <p:cBhvr>
+                                  <p:cTn id="14" dur="1" fill="hold">
+                                    <p:stCondLst>
+                                      <p:cond delay="0"/>
+                                    </p:stCondLst>
+                                  </p:cTn>
+                                  <p:tgtEl>
+                                    <p:spTgt spid="11"/>
+                                  </p:tgtEl>
+                                  <p:attrNameLst>
+                                    <p:attrName>style.visibility</p:attrName>
+                                  </p:attrNameLst>
+                                </p:cBhvr>
+                                <p:to>
+                                  <p:strVal val="visible"/>
+                                </p:to>
+                              </p:set>
+                            </p:childTnLst>
+                          </p:cTn>
+                        </p:par>
+                        <p:par>
+                          <p:cTn id="15" presetID="1" presetClass="entr" presetSubtype="0" fill="hold">
+                            <p:stCondLst>
+                              <p:cond delay="0"/>
+                            </p:stCondLst>
+                            <p:childTnLst>
+                              <p:set>
+                                <p:cBhvr>
+                                  <p:cTn id="16" dur="1" fill="hold">
+                                    <p:stCondLst>
+                                      <p:cond delay="0"/>
+                                    </p:stCondLst>
+                                  </p:cTn>
+                                  <p:tgtEl>
+                                    <p:spTgt spid="12"/>
+                                  </p:tgtEl>
+                                  <p:attrNameLst>
+                                    <p:attrName>style.visibility</p:attrName>
+                                  </p:attrNameLst>
+                                </p:cBhvr>
+                                <p:to>
+                                  <p:strVal val="visible"/>
+                                </p:to>
+                              </p:set>
+                            </p:childTnLst>
+                          </p:cTn>
+                        </p:par>
+                      </p:childTnLst>
+                    </p:cTn>
+                  </p:par>
+                  <p:par>
+                    <p:cTn id="17" fill="hold">
+                      <p:stCondLst>
+                        <p:cond delay="0"/>
+                      </p:stCondLst>
+                      <p:childTnLst>
+                        <p:par>
+                          <p:cTn id="18" presetID="1" presetClass="entr" presetSubtype="0" fill="hold">
+                            <p:stCondLst>
+                              <p:cond delay="0"/>
+                            </p:stCondLst>
+                            <p:childTnLst>
+                              <p:set>
+                                <p:cBhvr>
+                                  <p:cTn id="19" dur="1" fill="hold">
+                                    <p:stCondLst>
+                                      <p:cond delay="0"/>
+                                    </p:stCondLst>
+                                  </p:cTn>
+                                  <p:tgtEl>
+                                    <p:spTgt spid="13"/>
+                                  </p:tgtEl>
+                                  <p:attrNameLst>
+                                    <p:attrName>style.visibility</p:attrName>
+                                  </p:attrNameLst>
+                                </p:cBhvr>
+                                <p:to>
+                                  <p:strVal val="visible"/>
+                                </p:to>
+                              </p:set>
+                            </p:childTnLst>
+                          </p:cTn>
+                        </p:par>
+                        <p:par>
+                          <p:cTn id="20" presetID="1" presetClass="entr" presetSubtype="0" fill="hold">
+                            <p:stCondLst>
+                              <p:cond delay="0"/>
+                            </p:stCondLst>
+                            <p:childTnLst>
+                              <p:set>
+                                <p:cBhvr>
+                                  <p:cTn id="21" dur="1" fill="hold">
+                                    <p:stCondLst>
+                                      <p:cond delay="0"/>
+                                    </p:stCondLst>
+                                  </p:cTn>
+                                  <p:tgtEl>
+                                    <p:spTgt spid="14"/>
+                                  </p:tgtEl>
+                                  <p:attrNameLst>
+                                    <p:attrName>style.visibility</p:attrName>
+                                  </p:attrNameLst>
+                                </p:cBhvr>
+                                <p:to>
+                                  <p:strVal val="visible"/>
+                                </p:to>
+                              </p:set>
+                            </p:childTnLst>
+                          </p:cTn>
+                        </p:par>
+                        <p:par>
+                          <p:cTn id="22" presetID="1" presetClass="entr" presetSubtype="0" fill="hold">
+                            <p:stCondLst>
+                              <p:cond delay="0"/>
+                            </p:stCondLst>
+                            <p:childTnLst>
+                              <p:set>
+                                <p:cBhvr>
+                                  <p:cTn id="23" dur="1" fill="hold">
+                                    <p:stCondLst>
+                                      <p:cond delay="0"/>
+                                    </p:stCondLst>
+                                  </p:cTn>
+                                  <p:tgtEl>
+                                    <p:spTgt spid="15"/>
+                                  </p:tgtEl>
+                                  <p:attrNameLst>
+                                    <p:attrName>style.visibility</p:attrName>
+                                  </p:attrNameLst>
+                                </p:cBhvr>
+                                <p:to>
+                                  <p:strVal val="visible"/>
+                                </p:to>
+                              </p:set>
+                            </p:childTnLst>
+                          </p:cTn>
+                        </p:par>
+                      </p:childTnLst>
+                    </p:cTn>
+                  </p:par>
+                  <p:par>
+                    <p:cTn id="24" fill="hold">
+                      <p:stCondLst>
+                        <p:cond delay="0"/>
+                      </p:stCondLst>
+                      <p:childTnLst>
+                        <p:par>
+                          <p:cTn id="25" presetID="1" presetClass="entr" presetSubtype="0" fill="hold">
+                            <p:stCondLst>
+                              <p:cond delay="0"/>
+                            </p:stCondLst>
+                            <p:childTnLst>
+                              <p:set>
+                                <p:cBhvr>
+                                  <p:cTn id="26" dur="1" fill="hold">
+                                    <p:stCondLst>
+                                      <p:cond delay="0"/>
+                                    </p:stCondLst>
+                                  </p:cTn>
+                                  <p:tgtEl>
+                                    <p:spTgt spid="16"/>
+                                  </p:tgtEl>
+                                  <p:attrNameLst>
+                                    <p:attrName>style.visibility</p:attrName>
+                                  </p:attrNameLst>
+                                </p:cBhvr>
+                                <p:to>
+                                  <p:strVal val="visible"/>
+                                </p:to>
+                              </p:set>
+                            </p:childTnLst>
+                          </p:cTn>
+                        </p:par>
+                        <p:par>
+                          <p:cTn id="27" presetID="1" presetClass="entr" presetSubtype="0" fill="hold">
+                            <p:stCondLst>
+                              <p:cond delay="0"/>
+                            </p:stCondLst>
+                            <p:childTnLst>
+                              <p:set>
+                                <p:cBhvr>
+                                  <p:cTn id="28" dur="1" fill="hold">
+                                    <p:stCondLst>
+                                      <p:cond delay="0"/>
+                                    </p:stCondLst>
+                                  </p:cTn>
+                                  <p:tgtEl>
+                                    <p:spTgt spid="17"/>
+                                  </p:tgtEl>
+                                  <p:attrNameLst>
+                                    <p:attrName>style.visibility</p:attrName>
+                                  </p:attrNameLst>
+                                </p:cBhvr>
+                                <p:to>
+                                  <p:strVal val="visible"/>
+                                </p:to>
+                              </p:set>
+                            </p:childTnLst>
+                          </p:cTn>
+                        </p:par>
+                        <p:par>
+                          <p:cTn id="29" presetID="1" presetClass="entr" presetSubtype="0" fill="hold">
+                            <p:stCondLst>
+                              <p:cond delay="0"/>
+                            </p:stCondLst>
+                            <p:childTnLst>
+                              <p:set>
+                                <p:cBhvr>
+                                  <p:cTn id="30" dur="1" fill="hold">
+                                    <p:stCondLst>
+                                      <p:cond delay="0"/>
+                                    </p:stCondLst>
+                                  </p:cTn>
+                                  <p:tgtEl>
+                                    <p:spTgt spid="18"/>
+                                  </p:tgtEl>
+                                  <p:attrNameLst>
+                                    <p:attrName>style.visibility</p:attrName>
+                                  </p:attrNameLst>
+                                </p:cBhvr>
+                                <p:to>
+                                  <p:strVal val="visible"/>
+                                </p:to>
+                              </p:set>
+                            </p:childTnLst>
+                          </p:cTn>
+                        </p:par>
+                      </p:childTnLst>
+                    </p:cTn>
+                  </p:par>
+                </p:childTnLst>
+              </p:cTn>
+              <p:prevCondLst>
+                <p:cond evt="onPrev" delay="0">
+                  <p:tgtEl>
+                    <p:sldTgt/>
+                  </p:tgtEl>
+                </p:cond>
+              </p:prevCondLst>
+              <p:nextCondLst>
+                <p:cond evt="onNext" delay="0">
+                  <p:tgtEl>
+                    <p:sldTgt/>
+                  </p:tgtEl>
+                </p:cond>
+              </p:nextCondLst>
+            </p:seq>
+          </p:childTnLst>
+        </p:cTn>
+      </p:par>
+    </p:tnLst>
+  </p:timing>
   <p:transition spd="med">
     <p:wipe/>
   </p:transition>
@@ -5936,7 +6946,7 @@
                 </a:solidFill>
                 <a:latin typeface="Arial"/>
               </a:rPr>
-              <a:t>  LỚP 4 • LUYỆN TẬP</a:t>
+              <a:t>  LỚP 4 • THỬ THÁCH</a:t>
             </a:r>
           </a:p>
         </p:txBody>
@@ -5978,14 +6988,100 @@
       </p:sp>
       <p:sp>
         <p:nvSpPr>
-          <p:cNvPr id="6" name="TextBox 5"/>
+          <p:cNvPr id="6" name="Rounded Rectangle 5"/>
+          <p:cNvSpPr/>
+          <p:nvPr/>
+        </p:nvSpPr>
+        <p:spPr>
+          <a:xfrm>
+            <a:off x="365760" y="2286000"/>
+            <a:ext cx="6400800" cy="3383279"/>
+          </a:xfrm>
+          <a:prstGeom prst="roundRect">
+            <a:avLst/>
+          </a:prstGeom>
+          <a:solidFill>
+            <a:srgbClr val="FFFFFF"/>
+          </a:solidFill>
+          <a:ln>
+            <a:noFill/>
+          </a:ln>
+        </p:spPr>
+        <p:style>
+          <a:lnRef idx="1">
+            <a:schemeClr val="accent1"/>
+          </a:lnRef>
+          <a:fillRef idx="3">
+            <a:schemeClr val="accent1"/>
+          </a:fillRef>
+          <a:effectRef idx="2">
+            <a:schemeClr val="accent1"/>
+          </a:effectRef>
+          <a:fontRef idx="minor">
+            <a:schemeClr val="lt1"/>
+          </a:fontRef>
+        </p:style>
+        <p:txBody>
+          <a:bodyPr rtlCol="0" anchor="ctr"/>
+          <a:lstStyle/>
+          <a:p>
+            <a:pPr algn="ctr"/>
+          </a:p>
+        </p:txBody>
+      </p:sp>
+      <p:sp>
+        <p:nvSpPr>
+          <p:cNvPr id="7" name="Rectangle 6"/>
+          <p:cNvSpPr/>
+          <p:nvPr/>
+        </p:nvSpPr>
+        <p:spPr>
+          <a:xfrm>
+            <a:off x="365760" y="2286000"/>
+            <a:ext cx="109728" cy="3383279"/>
+          </a:xfrm>
+          <a:prstGeom prst="rect">
+            <a:avLst/>
+          </a:prstGeom>
+          <a:solidFill>
+            <a:srgbClr val="4F46E5"/>
+          </a:solidFill>
+          <a:ln>
+            <a:noFill/>
+          </a:ln>
+        </p:spPr>
+        <p:style>
+          <a:lnRef idx="1">
+            <a:schemeClr val="accent1"/>
+          </a:lnRef>
+          <a:fillRef idx="3">
+            <a:schemeClr val="accent1"/>
+          </a:fillRef>
+          <a:effectRef idx="2">
+            <a:schemeClr val="accent1"/>
+          </a:effectRef>
+          <a:fontRef idx="minor">
+            <a:schemeClr val="lt1"/>
+          </a:fontRef>
+        </p:style>
+        <p:txBody>
+          <a:bodyPr rtlCol="0" anchor="ctr"/>
+          <a:lstStyle/>
+          <a:p>
+            <a:pPr algn="ctr"/>
+          </a:p>
+        </p:txBody>
+      </p:sp>
+      <p:sp>
+        <p:nvSpPr>
+          <p:cNvPr id="8" name="TextBox 7"/>
           <p:cNvSpPr txBox="1"/>
           <p:nvPr/>
         </p:nvSpPr>
         <p:spPr>
           <a:xfrm>
-            <a:off x="457200" y="2286000"/>
-            <a:ext cx="11274552" cy="822960"/>
+            <a:off x="731520" y="2468880"/>
+            <a:ext cx="5852160" cy="3017520"/>
           </a:xfrm>
           <a:prstGeom prst="rect">
             <a:avLst/>
@@ -6004,88 +7100,48 @@
               </a:spcAft>
             </a:pPr>
             <a:r>
-              <a:rPr sz="1700" b="0">
+              <a:rPr sz="2000" b="0">
                 <a:solidFill>
                   <a:srgbClr val="1E1B4B"/>
                 </a:solidFill>
                 <a:latin typeface="Arial"/>
               </a:rPr>
-              <a:t>Em hãy nhìn quanh phòng máy:</a:t>
-            </a:r>
-          </a:p>
-          <a:p>
-            <a:pPr algn="l">
-              <a:spcAft>
-                <a:spcPts val="600"/>
-              </a:spcAft>
-            </a:pPr>
-            <a:r>
-              <a:rPr sz="1700" b="0">
-                <a:solidFill>
-                  <a:srgbClr val="1E1B4B"/>
-                </a:solidFill>
-                <a:latin typeface="Arial"/>
-              </a:rPr>
-              <a:t>● Liệt kê 3 phần cứng em thấy</a:t>
-            </a:r>
-          </a:p>
-          <a:p>
-            <a:pPr algn="l">
-              <a:spcAft>
-                <a:spcPts val="600"/>
-              </a:spcAft>
-            </a:pPr>
-            <a:r>
-              <a:rPr sz="1700" b="0">
-                <a:solidFill>
-                  <a:srgbClr val="1E1B4B"/>
-                </a:solidFill>
-                <a:latin typeface="Arial"/>
-              </a:rPr>
-              <a:t>● Kể 3 phần mềm em đã từng dùng</a:t>
-            </a:r>
-          </a:p>
-          <a:p>
-            <a:pPr algn="l">
-              <a:spcAft>
-                <a:spcPts val="600"/>
-              </a:spcAft>
-            </a:pPr>
-            <a:r>
-              <a:rPr sz="1700" b="0">
-                <a:solidFill>
-                  <a:srgbClr val="1E1B4B"/>
-                </a:solidFill>
-                <a:latin typeface="Arial"/>
-              </a:rPr>
-              <a:t/>
-            </a:r>
-          </a:p>
-          <a:p>
-            <a:pPr algn="l">
-              <a:spcAft>
-                <a:spcPts val="600"/>
-              </a:spcAft>
-            </a:pPr>
-            <a:r>
-              <a:rPr sz="1700" b="0">
-                <a:solidFill>
-                  <a:srgbClr val="1E1B4B"/>
-                </a:solidFill>
-                <a:latin typeface="Arial"/>
-              </a:rPr>
-              <a:t>Viết vào vở trong 3 phút!</a:t>
-            </a:r>
-          </a:p>
-        </p:txBody>
-      </p:sp>
+              <a:t>Quan sát phòng máy và thực hiện:</a:t>
+            </a:r>
+          </a:p>
+        </p:txBody>
+      </p:sp>
+      <p:pic>
+        <p:nvPicPr>
+          <p:cNvPr id="9" name="Picture 8" descr="bai1_p10_img297.jpeg"/>
+          <p:cNvPicPr>
+            <a:picLocks noChangeAspect="1"/>
+          </p:cNvPicPr>
+          <p:nvPr/>
+        </p:nvPicPr>
+        <p:blipFill>
+          <a:blip r:embed="rId2"/>
+          <a:stretch>
+            <a:fillRect/>
+          </a:stretch>
+        </p:blipFill>
+        <p:spPr>
+          <a:xfrm>
+            <a:off x="7132320" y="2377440"/>
+            <a:ext cx="4572000" cy="3200399"/>
+          </a:xfrm>
+          <a:prstGeom prst="rect">
+            <a:avLst/>
+          </a:prstGeom>
+        </p:spPr>
+      </p:pic>
     </p:spTree>
   </p:cSld>
   <p:clrMapOvr>
     <a:masterClrMapping/>
   </p:clrMapOvr>
   <p:transition spd="med">
-    <p:wipe/>
+    <p:cover/>
   </p:transition>
 </p:sld>
 </file>
@@ -6401,8 +7457,8 @@
         </p:nvSpPr>
         <p:spPr>
           <a:xfrm>
-            <a:off x="1371600" y="2377440"/>
-            <a:ext cx="9445752" cy="457200"/>
+            <a:off x="1371600" y="2423160"/>
+            <a:ext cx="9445752" cy="365760"/>
           </a:xfrm>
           <a:prstGeom prst="rect">
             <a:avLst/>
@@ -6423,7 +7479,7 @@
                 </a:solidFill>
                 <a:latin typeface="Arial"/>
               </a:rPr>
-              <a:t>Phần cứng = sờ được, nhìn thấy (Hardware)</a:t>
+              <a:t>Phần cứng: nhìn thấy và sờ được (Hardware)</a:t>
             </a:r>
           </a:p>
         </p:txBody>
@@ -6436,8 +7492,8 @@
         </p:nvSpPr>
         <p:spPr>
           <a:xfrm>
-            <a:off x="914400" y="3200400"/>
-            <a:ext cx="73152" cy="640080"/>
+            <a:off x="914400" y="3291840"/>
+            <a:ext cx="73152" cy="640079"/>
           </a:xfrm>
           <a:prstGeom prst="rect">
             <a:avLst/>
@@ -6479,8 +7535,8 @@
         </p:nvSpPr>
         <p:spPr>
           <a:xfrm>
-            <a:off x="1097280" y="3200400"/>
-            <a:ext cx="9994392" cy="640080"/>
+            <a:off x="1097280" y="3291840"/>
+            <a:ext cx="9994392" cy="640079"/>
           </a:xfrm>
           <a:prstGeom prst="roundRect">
             <a:avLst/>
@@ -6522,8 +7578,8 @@
         </p:nvSpPr>
         <p:spPr>
           <a:xfrm>
-            <a:off x="1371600" y="3291840"/>
-            <a:ext cx="9445752" cy="457200"/>
+            <a:off x="1371600" y="3429000"/>
+            <a:ext cx="9445752" cy="365760"/>
           </a:xfrm>
           <a:prstGeom prst="rect">
             <a:avLst/>
@@ -6544,7 +7600,7 @@
                 </a:solidFill>
                 <a:latin typeface="Arial"/>
               </a:rPr>
-              <a:t>Phần mềm = chương trình chạy bên trong (Software)</a:t>
+              <a:t>Phần mềm: chương trình chạy bên trong (Software)</a:t>
             </a:r>
           </a:p>
         </p:txBody>
@@ -6557,7 +7613,7 @@
         </p:nvSpPr>
         <p:spPr>
           <a:xfrm>
-            <a:off x="914400" y="4114800"/>
+            <a:off x="914400" y="4297680"/>
             <a:ext cx="73152" cy="640080"/>
           </a:xfrm>
           <a:prstGeom prst="rect">
@@ -6600,7 +7656,7 @@
         </p:nvSpPr>
         <p:spPr>
           <a:xfrm>
-            <a:off x="1097280" y="4114800"/>
+            <a:off x="1097280" y="4297680"/>
             <a:ext cx="9994392" cy="640080"/>
           </a:xfrm>
           <a:prstGeom prst="roundRect">
@@ -6643,8 +7699,8 @@
         </p:nvSpPr>
         <p:spPr>
           <a:xfrm>
-            <a:off x="1371600" y="4206240"/>
-            <a:ext cx="9445752" cy="457200"/>
+            <a:off x="1371600" y="4434840"/>
+            <a:ext cx="9445752" cy="365760"/>
           </a:xfrm>
           <a:prstGeom prst="rect">
             <a:avLst/>
@@ -6665,7 +7721,7 @@
                 </a:solidFill>
                 <a:latin typeface="Arial"/>
               </a:rPr>
-              <a:t>Máy tính cần CẢ phần cứng VÀ phần mềm</a:t>
+              <a:t>Phần cứng và phần mềm luôn đồng hành cùng nhau</a:t>
             </a:r>
           </a:p>
         </p:txBody>
@@ -6742,7 +7798,7 @@
         </p:nvSpPr>
         <p:spPr>
           <a:xfrm>
-            <a:off x="914400" y="1508760"/>
+            <a:off x="914400" y="1783080"/>
             <a:ext cx="10360152" cy="1097280"/>
           </a:xfrm>
           <a:prstGeom prst="rect">
@@ -6777,8 +7833,8 @@
         </p:nvSpPr>
         <p:spPr>
           <a:xfrm>
-            <a:off x="2436876" y="3063240"/>
-            <a:ext cx="7315200" cy="2285999"/>
+            <a:off x="2436876" y="3337560"/>
+            <a:ext cx="7315200" cy="1828800"/>
           </a:xfrm>
           <a:prstGeom prst="roundRect">
             <a:avLst/>
@@ -6820,8 +7876,8 @@
         </p:nvSpPr>
         <p:spPr>
           <a:xfrm>
-            <a:off x="2894076" y="3337560"/>
-            <a:ext cx="6400800" cy="1737360"/>
+            <a:off x="2894076" y="3611879"/>
+            <a:ext cx="6400800" cy="1280160"/>
           </a:xfrm>
           <a:prstGeom prst="rect">
             <a:avLst/>
@@ -6840,13 +7896,13 @@
               </a:spcAft>
             </a:pPr>
             <a:r>
-              <a:rPr sz="1800" b="0">
+              <a:rPr sz="2000" b="0">
                 <a:solidFill>
                   <a:srgbClr val="1E1B4B"/>
                 </a:solidFill>
                 <a:latin typeface="Arial"/>
               </a:rPr>
-              <a:t>BTVN: Về nhà, liệt kê</a:t>
+              <a:t>BTVN: Liệt kê 3 phần cứng và</a:t>
             </a:r>
           </a:p>
           <a:p>
@@ -6856,29 +7912,13 @@
               </a:spcAft>
             </a:pPr>
             <a:r>
-              <a:rPr sz="1800" b="0">
+              <a:rPr sz="2000" b="0">
                 <a:solidFill>
                   <a:srgbClr val="1E1B4B"/>
                 </a:solidFill>
                 <a:latin typeface="Arial"/>
               </a:rPr>
-              <a:t>3 phần cứng + 3 phần mềm</a:t>
-            </a:r>
-          </a:p>
-          <a:p>
-            <a:pPr algn="ctr">
-              <a:spcAft>
-                <a:spcPts val="600"/>
-              </a:spcAft>
-            </a:pPr>
-            <a:r>
-              <a:rPr sz="1800" b="0">
-                <a:solidFill>
-                  <a:srgbClr val="1E1B4B"/>
-                </a:solidFill>
-                <a:latin typeface="Arial"/>
-              </a:rPr>
-              <a:t>của máy tính ở nhà em!</a:t>
+              <a:t>3 phần mềm của máy tính ở nhà em!</a:t>
             </a:r>
           </a:p>
         </p:txBody>
